--- a/harness/out/pptx/pitch_deck_reorder/warm/deck.pptx
+++ b/harness/out/pptx/pitch_deck_reorder/warm/deck.pptx
@@ -3086,6 +3086,14 @@
 <file path=ppt/slides/slide1.xml><?xml version="1.0" encoding="utf-8"?>
 <p:sld xmlns:a="http://schemas.openxmlformats.org/drawingml/2006/main" xmlns:p="http://schemas.openxmlformats.org/presentationml/2006/main" xmlns:r="http://schemas.openxmlformats.org/officeDocument/2006/relationships">
   <p:cSld>
+    <p:bg>
+      <p:bgPr>
+        <a:solidFill>
+          <a:srgbClr val="FAF9F6"/>
+        </a:solidFill>
+        <a:effectLst/>
+      </p:bgPr>
+    </p:bg>
     <p:spTree>
       <p:nvGrpSpPr>
         <p:cNvPr id="1" name=""/>
@@ -3095,20 +3103,65 @@
       <p:grpSpPr/>
       <p:sp>
         <p:nvSpPr>
-          <p:cNvPr id="2" name="Rectangle 1"/>
+          <p:cNvPr id="2" name="TextBox 1"/>
+          <p:cNvSpPr txBox="1"/>
+          <p:nvPr/>
+        </p:nvSpPr>
+        <p:spPr>
+          <a:xfrm>
+            <a:off x="914400" y="2240280"/>
+            <a:ext cx="10362895" cy="1463040"/>
+          </a:xfrm>
+          <a:prstGeom prst="rect">
+            <a:avLst/>
+          </a:prstGeom>
+          <a:noFill/>
+        </p:spPr>
+        <p:txBody>
+          <a:bodyPr wrap="square" lIns="0" rIns="0" tIns="0" bIns="0">
+            <a:spAutoFit/>
+          </a:bodyPr>
+          <a:lstStyle/>
+          <a:p>
+            <a:pPr algn="ctr">
+              <a:lnSpc>
+                <a:spcPct val="115000"/>
+              </a:lnSpc>
+              <a:spcBef>
+                <a:spcPts val="0"/>
+              </a:spcBef>
+              <a:spcAft>
+                <a:spcPts val="0"/>
+              </a:spcAft>
+            </a:pPr>
+            <a:r>
+              <a:rPr sz="7200" b="1">
+                <a:solidFill>
+                  <a:srgbClr val="1A1A1A"/>
+                </a:solidFill>
+                <a:latin typeface="Arial"/>
+              </a:rPr>
+              <a:t>Marrow</a:t>
+            </a:r>
+          </a:p>
+        </p:txBody>
+      </p:sp>
+      <p:sp>
+        <p:nvSpPr>
+          <p:cNvPr id="3" name="Rectangle 2"/>
           <p:cNvSpPr/>
           <p:nvPr/>
         </p:nvSpPr>
         <p:spPr>
           <a:xfrm>
-            <a:off x="0" y="0"/>
-            <a:ext cx="12191695" cy="6858000"/>
+            <a:off x="5181447" y="3703320"/>
+            <a:ext cx="1828800" cy="57150"/>
           </a:xfrm>
           <a:prstGeom prst="rect">
             <a:avLst/>
           </a:prstGeom>
           <a:solidFill>
-            <a:srgbClr val="121621"/>
+            <a:srgbClr val="C2410C"/>
           </a:solidFill>
           <a:ln>
             <a:noFill/>
@@ -3139,14 +3192,14 @@
       </p:sp>
       <p:sp>
         <p:nvSpPr>
-          <p:cNvPr id="3" name="TextBox 2"/>
+          <p:cNvPr id="4" name="TextBox 3"/>
           <p:cNvSpPr txBox="1"/>
           <p:nvPr/>
         </p:nvSpPr>
         <p:spPr>
           <a:xfrm>
-            <a:off x="1097280" y="2377440"/>
-            <a:ext cx="10058400" cy="2194560"/>
+            <a:off x="914400" y="4160520"/>
+            <a:ext cx="10362895" cy="822960"/>
           </a:xfrm>
           <a:prstGeom prst="rect">
             <a:avLst/>
@@ -3154,60 +3207,121 @@
           <a:noFill/>
         </p:spPr>
         <p:txBody>
-          <a:bodyPr wrap="square" anchor="t">
+          <a:bodyPr wrap="square" lIns="0" rIns="0" tIns="0" bIns="0">
             <a:spAutoFit/>
           </a:bodyPr>
           <a:lstStyle/>
           <a:p>
             <a:pPr algn="ctr">
+              <a:lnSpc>
+                <a:spcPct val="115000"/>
+              </a:lnSpc>
+              <a:spcBef>
+                <a:spcPts val="0"/>
+              </a:spcBef>
               <a:spcAft>
-                <a:spcPts val="1800"/>
+                <a:spcPts val="0"/>
               </a:spcAft>
             </a:pPr>
             <a:r>
-              <a:rPr sz="8800" b="1">
+              <a:rPr sz="2200" b="0">
                 <a:solidFill>
-                  <a:srgbClr val="E8ECF2"/>
+                  <a:srgbClr val="6B6B66"/>
                 </a:solidFill>
-                <a:latin typeface="Helvetica Neue"/>
+                <a:latin typeface="Arial"/>
               </a:rPr>
-              <a:t>Marrow</a:t>
-            </a:r>
-          </a:p>
+              <a:t>Know what your tests actually cover.</a:t>
+            </a:r>
+          </a:p>
+        </p:txBody>
+      </p:sp>
+    </p:spTree>
+  </p:cSld>
+  <p:clrMapOvr>
+    <a:masterClrMapping/>
+  </p:clrMapOvr>
+</p:sld>
+</file>
+
+<file path=ppt/slides/slide2.xml><?xml version="1.0" encoding="utf-8"?>
+<p:sld xmlns:a="http://schemas.openxmlformats.org/drawingml/2006/main" xmlns:p="http://schemas.openxmlformats.org/presentationml/2006/main" xmlns:r="http://schemas.openxmlformats.org/officeDocument/2006/relationships">
+  <p:cSld>
+    <p:bg>
+      <p:bgPr>
+        <a:solidFill>
+          <a:srgbClr val="C2410C"/>
+        </a:solidFill>
+        <a:effectLst/>
+      </p:bgPr>
+    </p:bg>
+    <p:spTree>
+      <p:nvGrpSpPr>
+        <p:cNvPr id="1" name=""/>
+        <p:cNvGrpSpPr/>
+        <p:nvPr/>
+      </p:nvGrpSpPr>
+      <p:grpSpPr/>
+      <p:sp>
+        <p:nvSpPr>
+          <p:cNvPr id="2" name="TextBox 1"/>
+          <p:cNvSpPr txBox="1"/>
+          <p:nvPr/>
+        </p:nvSpPr>
+        <p:spPr>
+          <a:xfrm>
+            <a:off x="914400" y="777240"/>
+            <a:ext cx="10362895" cy="914400"/>
+          </a:xfrm>
+          <a:prstGeom prst="rect">
+            <a:avLst/>
+          </a:prstGeom>
+          <a:noFill/>
+        </p:spPr>
+        <p:txBody>
+          <a:bodyPr wrap="square" lIns="0" rIns="0" tIns="0" bIns="0">
+            <a:spAutoFit/>
+          </a:bodyPr>
+          <a:lstStyle/>
           <a:p>
             <a:pPr algn="ctr">
+              <a:lnSpc>
+                <a:spcPct val="115000"/>
+              </a:lnSpc>
+              <a:spcBef>
+                <a:spcPts val="0"/>
+              </a:spcBef>
               <a:spcAft>
-                <a:spcPts val="1000"/>
+                <a:spcPts val="0"/>
               </a:spcAft>
             </a:pPr>
             <a:r>
-              <a:rPr sz="3200" b="0">
+              <a:rPr sz="4000" b="1">
                 <a:solidFill>
-                  <a:srgbClr val="4FD1C5"/>
+                  <a:srgbClr val="FFF6EE"/>
                 </a:solidFill>
-                <a:latin typeface="Helvetica Neue"/>
+                <a:latin typeface="Arial"/>
               </a:rPr>
-              <a:t>Know what your tests actually cover.</a:t>
-            </a:r>
-          </a:p>
-        </p:txBody>
-      </p:sp>
-      <p:sp>
-        <p:nvSpPr>
-          <p:cNvPr id="4" name="Rectangle 3"/>
+              <a:t>Install Marrow</a:t>
+            </a:r>
+          </a:p>
+        </p:txBody>
+      </p:sp>
+      <p:sp>
+        <p:nvSpPr>
+          <p:cNvPr id="3" name="Rectangle 2"/>
           <p:cNvSpPr/>
           <p:nvPr/>
         </p:nvSpPr>
         <p:spPr>
           <a:xfrm>
-            <a:off x="5541264" y="4297680"/>
-            <a:ext cx="1097280" cy="76200"/>
+            <a:off x="5455767" y="1691640"/>
+            <a:ext cx="1280160" cy="57150"/>
           </a:xfrm>
           <a:prstGeom prst="rect">
             <a:avLst/>
           </a:prstGeom>
           <a:solidFill>
-            <a:srgbClr val="4FD1C5"/>
+            <a:srgbClr val="FFF6EE"/>
           </a:solidFill>
           <a:ln>
             <a:noFill/>
@@ -3236,40 +3350,22 @@
           </a:p>
         </p:txBody>
       </p:sp>
-    </p:spTree>
-  </p:cSld>
-  <p:clrMapOvr>
-    <a:masterClrMapping/>
-  </p:clrMapOvr>
-</p:sld>
-</file>
-
-<file path=ppt/slides/slide2.xml><?xml version="1.0" encoding="utf-8"?>
-<p:sld xmlns:a="http://schemas.openxmlformats.org/drawingml/2006/main" xmlns:p="http://schemas.openxmlformats.org/presentationml/2006/main" xmlns:r="http://schemas.openxmlformats.org/officeDocument/2006/relationships">
-  <p:cSld>
-    <p:spTree>
-      <p:nvGrpSpPr>
-        <p:cNvPr id="1" name=""/>
-        <p:cNvGrpSpPr/>
-        <p:nvPr/>
-      </p:nvGrpSpPr>
-      <p:grpSpPr/>
-      <p:sp>
-        <p:nvSpPr>
-          <p:cNvPr id="2" name="Rectangle 1"/>
+      <p:sp>
+        <p:nvSpPr>
+          <p:cNvPr id="4" name="Rounded Rectangle 3"/>
           <p:cNvSpPr/>
           <p:nvPr/>
         </p:nvSpPr>
         <p:spPr>
           <a:xfrm>
-            <a:off x="0" y="0"/>
-            <a:ext cx="12191695" cy="6858000"/>
+            <a:off x="3169767" y="2606040"/>
+            <a:ext cx="5852160" cy="1234440"/>
           </a:xfrm>
-          <a:prstGeom prst="rect">
+          <a:prstGeom prst="roundRect">
             <a:avLst/>
           </a:prstGeom>
           <a:solidFill>
-            <a:srgbClr val="121621"/>
+            <a:srgbClr val="8C2D07"/>
           </a:solidFill>
           <a:ln>
             <a:noFill/>
@@ -3291,10 +3387,145 @@
           </a:fontRef>
         </p:style>
         <p:txBody>
-          <a:bodyPr rtlCol="0" anchor="ctr"/>
-          <a:lstStyle/>
-          <a:p>
-            <a:pPr algn="ctr"/>
+          <a:bodyPr rtlCol="0" anchor="ctr" wrap="square"/>
+          <a:lstStyle/>
+          <a:p>
+            <a:pPr algn="ctr">
+              <a:lnSpc>
+                <a:spcPct val="115000"/>
+              </a:lnSpc>
+              <a:spcBef>
+                <a:spcPts val="0"/>
+              </a:spcBef>
+              <a:spcAft>
+                <a:spcPts val="0"/>
+              </a:spcAft>
+            </a:pPr>
+            <a:r>
+              <a:rPr sz="2400" b="1">
+                <a:solidFill>
+                  <a:srgbClr val="FFF6EE"/>
+                </a:solidFill>
+                <a:latin typeface="Consolas"/>
+              </a:rPr>
+              <a:t>pipx install marrow</a:t>
+            </a:r>
+          </a:p>
+        </p:txBody>
+      </p:sp>
+      <p:sp>
+        <p:nvSpPr>
+          <p:cNvPr id="5" name="TextBox 4"/>
+          <p:cNvSpPr txBox="1"/>
+          <p:nvPr/>
+        </p:nvSpPr>
+        <p:spPr>
+          <a:xfrm>
+            <a:off x="914400" y="4343400"/>
+            <a:ext cx="10362895" cy="914400"/>
+          </a:xfrm>
+          <a:prstGeom prst="rect">
+            <a:avLst/>
+          </a:prstGeom>
+          <a:noFill/>
+        </p:spPr>
+        <p:txBody>
+          <a:bodyPr wrap="square" lIns="0" rIns="0" tIns="0" bIns="0">
+            <a:spAutoFit/>
+          </a:bodyPr>
+          <a:lstStyle/>
+          <a:p>
+            <a:pPr algn="ctr">
+              <a:lnSpc>
+                <a:spcPct val="115000"/>
+              </a:lnSpc>
+              <a:spcBef>
+                <a:spcPts val="0"/>
+              </a:spcBef>
+              <a:spcAft>
+                <a:spcPts val="0"/>
+              </a:spcAft>
+            </a:pPr>
+            <a:r>
+              <a:rPr sz="2000" b="0">
+                <a:solidFill>
+                  <a:srgbClr val="FFF6EE"/>
+                </a:solidFill>
+                <a:latin typeface="Arial"/>
+              </a:rPr>
+              <a:t>Works with pytest, Jest, go test.</a:t>
+            </a:r>
+          </a:p>
+        </p:txBody>
+      </p:sp>
+    </p:spTree>
+  </p:cSld>
+  <p:clrMapOvr>
+    <a:masterClrMapping/>
+  </p:clrMapOvr>
+</p:sld>
+</file>
+
+<file path=ppt/slides/slide3.xml><?xml version="1.0" encoding="utf-8"?>
+<p:sld xmlns:a="http://schemas.openxmlformats.org/drawingml/2006/main" xmlns:p="http://schemas.openxmlformats.org/presentationml/2006/main" xmlns:r="http://schemas.openxmlformats.org/officeDocument/2006/relationships">
+  <p:cSld>
+    <p:bg>
+      <p:bgPr>
+        <a:solidFill>
+          <a:srgbClr val="FAF9F6"/>
+        </a:solidFill>
+        <a:effectLst/>
+      </p:bgPr>
+    </p:bg>
+    <p:spTree>
+      <p:nvGrpSpPr>
+        <p:cNvPr id="1" name=""/>
+        <p:cNvGrpSpPr/>
+        <p:nvPr/>
+      </p:nvGrpSpPr>
+      <p:grpSpPr/>
+      <p:sp>
+        <p:nvSpPr>
+          <p:cNvPr id="2" name="TextBox 1"/>
+          <p:cNvSpPr txBox="1"/>
+          <p:nvPr/>
+        </p:nvSpPr>
+        <p:spPr>
+          <a:xfrm>
+            <a:off x="914400" y="777240"/>
+            <a:ext cx="10362895" cy="914400"/>
+          </a:xfrm>
+          <a:prstGeom prst="rect">
+            <a:avLst/>
+          </a:prstGeom>
+          <a:noFill/>
+        </p:spPr>
+        <p:txBody>
+          <a:bodyPr wrap="square" lIns="0" rIns="0" tIns="0" bIns="0">
+            <a:spAutoFit/>
+          </a:bodyPr>
+          <a:lstStyle/>
+          <a:p>
+            <a:pPr algn="ctr">
+              <a:lnSpc>
+                <a:spcPct val="115000"/>
+              </a:lnSpc>
+              <a:spcBef>
+                <a:spcPts val="0"/>
+              </a:spcBef>
+              <a:spcAft>
+                <a:spcPts val="0"/>
+              </a:spcAft>
+            </a:pPr>
+            <a:r>
+              <a:rPr sz="4000" b="1">
+                <a:solidFill>
+                  <a:srgbClr val="1A1A1A"/>
+                </a:solidFill>
+                <a:latin typeface="Arial"/>
+              </a:rPr>
+              <a:t>Big test suites hide their gaps.</a:t>
+            </a:r>
           </a:p>
         </p:txBody>
       </p:sp>
@@ -3306,14 +3537,14 @@
         </p:nvSpPr>
         <p:spPr>
           <a:xfrm>
-            <a:off x="822960" y="1051560"/>
-            <a:ext cx="1005840" cy="76200"/>
+            <a:off x="5455767" y="1691640"/>
+            <a:ext cx="1280160" cy="57150"/>
           </a:xfrm>
           <a:prstGeom prst="rect">
             <a:avLst/>
           </a:prstGeom>
           <a:solidFill>
-            <a:srgbClr val="4FD1C5"/>
+            <a:srgbClr val="C2410C"/>
           </a:solidFill>
           <a:ln>
             <a:noFill/>
@@ -3350,8 +3581,8 @@
         </p:nvSpPr>
         <p:spPr>
           <a:xfrm>
-            <a:off x="822960" y="1371600"/>
-            <a:ext cx="10515600" cy="4114800"/>
+            <a:off x="1828800" y="2606040"/>
+            <a:ext cx="8534095" cy="2194560"/>
           </a:xfrm>
           <a:prstGeom prst="rect">
             <a:avLst/>
@@ -3359,56 +3590,52 @@
           <a:noFill/>
         </p:spPr>
         <p:txBody>
-          <a:bodyPr wrap="square" anchor="t">
+          <a:bodyPr wrap="square" lIns="0" rIns="0" tIns="0" bIns="0">
             <a:spAutoFit/>
           </a:bodyPr>
           <a:lstStyle/>
           <a:p>
-            <a:pPr algn="l">
+            <a:pPr algn="ctr">
+              <a:lnSpc>
+                <a:spcPct val="135000"/>
+              </a:lnSpc>
+              <a:spcBef>
+                <a:spcPts val="0"/>
+              </a:spcBef>
               <a:spcAft>
-                <a:spcPts val="2800"/>
+                <a:spcPts val="0"/>
               </a:spcAft>
             </a:pPr>
             <a:r>
-              <a:rPr sz="5200" b="1">
+              <a:rPr sz="2000" b="0">
                 <a:solidFill>
-                  <a:srgbClr val="E8ECF2"/>
+                  <a:srgbClr val="1A1A1A"/>
                 </a:solidFill>
-                <a:latin typeface="Helvetica Neue"/>
+                <a:latin typeface="Arial"/>
               </a:rPr>
-              <a:t>Install Marrow</a:t>
-            </a:r>
-          </a:p>
-          <a:p>
-            <a:pPr algn="l">
+              <a:t>Large suites are slow, and nobody knows which tests cover which code.</a:t>
+            </a:r>
+          </a:p>
+          <a:p>
+            <a:pPr algn="ctr">
+              <a:lnSpc>
+                <a:spcPct val="135000"/>
+              </a:lnSpc>
+              <a:spcBef>
+                <a:spcPts val="1800"/>
+              </a:spcBef>
               <a:spcAft>
-                <a:spcPts val="2800"/>
+                <a:spcPts val="0"/>
               </a:spcAft>
             </a:pPr>
             <a:r>
-              <a:rPr sz="4000" b="1">
+              <a:rPr sz="2000" b="0">
                 <a:solidFill>
-                  <a:srgbClr val="4FD1C5"/>
+                  <a:srgbClr val="6B6B66"/>
                 </a:solidFill>
-                <a:latin typeface="Menlo"/>
+                <a:latin typeface="Arial"/>
               </a:rPr>
-              <a:t>pipx install marrow</a:t>
-            </a:r>
-          </a:p>
-          <a:p>
-            <a:pPr algn="l">
-              <a:spcAft>
-                <a:spcPts val="1000"/>
-              </a:spcAft>
-            </a:pPr>
-            <a:r>
-              <a:rPr sz="2600" b="0">
-                <a:solidFill>
-                  <a:srgbClr val="9AA6B8"/>
-                </a:solidFill>
-                <a:latin typeface="Helvetica Neue"/>
-              </a:rPr>
-              <a:t>Works with pytest, Jest, and go test.</a:t>
+              <a:t>So dead tests linger, and real gaps go unnoticed.</a:t>
             </a:r>
           </a:p>
         </p:txBody>
@@ -3421,9 +3648,17 @@
 </p:sld>
 </file>
 
-<file path=ppt/slides/slide3.xml><?xml version="1.0" encoding="utf-8"?>
+<file path=ppt/slides/slide4.xml><?xml version="1.0" encoding="utf-8"?>
 <p:sld xmlns:a="http://schemas.openxmlformats.org/drawingml/2006/main" xmlns:p="http://schemas.openxmlformats.org/presentationml/2006/main" xmlns:r="http://schemas.openxmlformats.org/officeDocument/2006/relationships">
   <p:cSld>
+    <p:bg>
+      <p:bgPr>
+        <a:solidFill>
+          <a:srgbClr val="FAF9F6"/>
+        </a:solidFill>
+        <a:effectLst/>
+      </p:bgPr>
+    </p:bg>
     <p:spTree>
       <p:nvGrpSpPr>
         <p:cNvPr id="1" name=""/>
@@ -3433,20 +3668,65 @@
       <p:grpSpPr/>
       <p:sp>
         <p:nvSpPr>
-          <p:cNvPr id="2" name="Rectangle 1"/>
+          <p:cNvPr id="2" name="TextBox 1"/>
+          <p:cNvSpPr txBox="1"/>
+          <p:nvPr/>
+        </p:nvSpPr>
+        <p:spPr>
+          <a:xfrm>
+            <a:off x="914400" y="777240"/>
+            <a:ext cx="10362895" cy="914400"/>
+          </a:xfrm>
+          <a:prstGeom prst="rect">
+            <a:avLst/>
+          </a:prstGeom>
+          <a:noFill/>
+        </p:spPr>
+        <p:txBody>
+          <a:bodyPr wrap="square" lIns="0" rIns="0" tIns="0" bIns="0">
+            <a:spAutoFit/>
+          </a:bodyPr>
+          <a:lstStyle/>
+          <a:p>
+            <a:pPr algn="ctr">
+              <a:lnSpc>
+                <a:spcPct val="115000"/>
+              </a:lnSpc>
+              <a:spcBef>
+                <a:spcPts val="0"/>
+              </a:spcBef>
+              <a:spcAft>
+                <a:spcPts val="0"/>
+              </a:spcAft>
+            </a:pPr>
+            <a:r>
+              <a:rPr sz="4000" b="1">
+                <a:solidFill>
+                  <a:srgbClr val="1A1A1A"/>
+                </a:solidFill>
+                <a:latin typeface="Arial"/>
+              </a:rPr>
+              <a:t>Watch one run. Draw the real map.</a:t>
+            </a:r>
+          </a:p>
+        </p:txBody>
+      </p:sp>
+      <p:sp>
+        <p:nvSpPr>
+          <p:cNvPr id="3" name="Rectangle 2"/>
           <p:cNvSpPr/>
           <p:nvPr/>
         </p:nvSpPr>
         <p:spPr>
           <a:xfrm>
-            <a:off x="0" y="0"/>
-            <a:ext cx="12191695" cy="6858000"/>
+            <a:off x="5455767" y="1691640"/>
+            <a:ext cx="1280160" cy="57150"/>
           </a:xfrm>
           <a:prstGeom prst="rect">
             <a:avLst/>
           </a:prstGeom>
           <a:solidFill>
-            <a:srgbClr val="121621"/>
+            <a:srgbClr val="C2410C"/>
           </a:solidFill>
           <a:ln>
             <a:noFill/>
@@ -3477,20 +3757,158 @@
       </p:sp>
       <p:sp>
         <p:nvSpPr>
+          <p:cNvPr id="4" name="TextBox 3"/>
+          <p:cNvSpPr txBox="1"/>
+          <p:nvPr/>
+        </p:nvSpPr>
+        <p:spPr>
+          <a:xfrm>
+            <a:off x="1828800" y="2606040"/>
+            <a:ext cx="8534095" cy="2194560"/>
+          </a:xfrm>
+          <a:prstGeom prst="rect">
+            <a:avLst/>
+          </a:prstGeom>
+          <a:noFill/>
+        </p:spPr>
+        <p:txBody>
+          <a:bodyPr wrap="square" lIns="0" rIns="0" tIns="0" bIns="0">
+            <a:spAutoFit/>
+          </a:bodyPr>
+          <a:lstStyle/>
+          <a:p>
+            <a:pPr algn="ctr">
+              <a:lnSpc>
+                <a:spcPct val="135000"/>
+              </a:lnSpc>
+              <a:spcBef>
+                <a:spcPts val="0"/>
+              </a:spcBef>
+              <a:spcAft>
+                <a:spcPts val="0"/>
+              </a:spcAft>
+            </a:pPr>
+            <a:r>
+              <a:rPr sz="2000" b="0">
+                <a:solidFill>
+                  <a:srgbClr val="1A1A1A"/>
+                </a:solidFill>
+                <a:latin typeface="Arial"/>
+              </a:rPr>
+              <a:t>Marrow instruments a single test run and produces a test → code coverage map.</a:t>
+            </a:r>
+          </a:p>
+          <a:p>
+            <a:pPr algn="ctr">
+              <a:lnSpc>
+                <a:spcPct val="135000"/>
+              </a:lnSpc>
+              <a:spcBef>
+                <a:spcPts val="1800"/>
+              </a:spcBef>
+              <a:spcAft>
+                <a:spcPts val="0"/>
+              </a:spcAft>
+            </a:pPr>
+            <a:r>
+              <a:rPr sz="2000" b="1">
+                <a:solidFill>
+                  <a:srgbClr val="C2410C"/>
+                </a:solidFill>
+                <a:latin typeface="Arial"/>
+              </a:rPr>
+              <a:t>No annotations. No config.</a:t>
+            </a:r>
+          </a:p>
+        </p:txBody>
+      </p:sp>
+    </p:spTree>
+  </p:cSld>
+  <p:clrMapOvr>
+    <a:masterClrMapping/>
+  </p:clrMapOvr>
+</p:sld>
+</file>
+
+<file path=ppt/slides/slide5.xml><?xml version="1.0" encoding="utf-8"?>
+<p:sld xmlns:a="http://schemas.openxmlformats.org/drawingml/2006/main" xmlns:p="http://schemas.openxmlformats.org/presentationml/2006/main" xmlns:r="http://schemas.openxmlformats.org/officeDocument/2006/relationships">
+  <p:cSld>
+    <p:bg>
+      <p:bgPr>
+        <a:solidFill>
+          <a:srgbClr val="FAF9F6"/>
+        </a:solidFill>
+        <a:effectLst/>
+      </p:bgPr>
+    </p:bg>
+    <p:spTree>
+      <p:nvGrpSpPr>
+        <p:cNvPr id="1" name=""/>
+        <p:cNvGrpSpPr/>
+        <p:nvPr/>
+      </p:nvGrpSpPr>
+      <p:grpSpPr/>
+      <p:sp>
+        <p:nvSpPr>
+          <p:cNvPr id="2" name="TextBox 1"/>
+          <p:cNvSpPr txBox="1"/>
+          <p:nvPr/>
+        </p:nvSpPr>
+        <p:spPr>
+          <a:xfrm>
+            <a:off x="914400" y="777240"/>
+            <a:ext cx="10362895" cy="914400"/>
+          </a:xfrm>
+          <a:prstGeom prst="rect">
+            <a:avLst/>
+          </a:prstGeom>
+          <a:noFill/>
+        </p:spPr>
+        <p:txBody>
+          <a:bodyPr wrap="square" lIns="0" rIns="0" tIns="0" bIns="0">
+            <a:spAutoFit/>
+          </a:bodyPr>
+          <a:lstStyle/>
+          <a:p>
+            <a:pPr algn="ctr">
+              <a:lnSpc>
+                <a:spcPct val="115000"/>
+              </a:lnSpc>
+              <a:spcBef>
+                <a:spcPts val="0"/>
+              </a:spcBef>
+              <a:spcAft>
+                <a:spcPts val="0"/>
+              </a:spcAft>
+            </a:pPr>
+            <a:r>
+              <a:rPr sz="4000" b="1">
+                <a:solidFill>
+                  <a:srgbClr val="1A1A1A"/>
+                </a:solidFill>
+                <a:latin typeface="Arial"/>
+              </a:rPr>
+              <a:t>Why now</a:t>
+            </a:r>
+          </a:p>
+        </p:txBody>
+      </p:sp>
+      <p:sp>
+        <p:nvSpPr>
           <p:cNvPr id="3" name="Rectangle 2"/>
           <p:cNvSpPr/>
           <p:nvPr/>
         </p:nvSpPr>
         <p:spPr>
           <a:xfrm>
-            <a:off x="822960" y="1051560"/>
-            <a:ext cx="1005840" cy="76200"/>
+            <a:off x="5455767" y="1691640"/>
+            <a:ext cx="1280160" cy="57150"/>
           </a:xfrm>
           <a:prstGeom prst="rect">
             <a:avLst/>
           </a:prstGeom>
           <a:solidFill>
-            <a:srgbClr val="4FD1C5"/>
+            <a:srgbClr val="C2410C"/>
           </a:solidFill>
           <a:ln>
             <a:noFill/>
@@ -3527,8 +3945,8 @@
         </p:nvSpPr>
         <p:spPr>
           <a:xfrm>
-            <a:off x="822960" y="1371600"/>
-            <a:ext cx="10515600" cy="4114800"/>
+            <a:off x="1828800" y="2606040"/>
+            <a:ext cx="8534095" cy="2377440"/>
           </a:xfrm>
           <a:prstGeom prst="rect">
             <a:avLst/>
@@ -3536,72 +3954,52 @@
           <a:noFill/>
         </p:spPr>
         <p:txBody>
-          <a:bodyPr wrap="square" anchor="t">
+          <a:bodyPr wrap="square" lIns="0" rIns="0" tIns="0" bIns="0">
             <a:spAutoFit/>
           </a:bodyPr>
           <a:lstStyle/>
           <a:p>
-            <a:pPr algn="l">
+            <a:pPr algn="ctr">
+              <a:lnSpc>
+                <a:spcPct val="135000"/>
+              </a:lnSpc>
+              <a:spcBef>
+                <a:spcPts val="0"/>
+              </a:spcBef>
               <a:spcAft>
-                <a:spcPts val="3000"/>
+                <a:spcPts val="0"/>
               </a:spcAft>
             </a:pPr>
             <a:r>
-              <a:rPr sz="4600" b="1">
+              <a:rPr sz="2000" b="1">
                 <a:solidFill>
-                  <a:srgbClr val="E8ECF2"/>
+                  <a:srgbClr val="1A1A1A"/>
                 </a:solidFill>
-                <a:latin typeface="Helvetica Neue"/>
+                <a:latin typeface="Arial"/>
               </a:rPr>
-              <a:t>Big test suites hide their gaps.</a:t>
-            </a:r>
-          </a:p>
-          <a:p>
-            <a:pPr algn="l">
+              <a:t>Test suites have outgrown the humans maintaining them.</a:t>
+            </a:r>
+          </a:p>
+          <a:p>
+            <a:pPr algn="ctr">
+              <a:lnSpc>
+                <a:spcPct val="135000"/>
+              </a:lnSpc>
+              <a:spcBef>
+                <a:spcPts val="1800"/>
+              </a:spcBef>
               <a:spcAft>
-                <a:spcPts val="1600"/>
+                <a:spcPts val="0"/>
               </a:spcAft>
             </a:pPr>
             <a:r>
-              <a:rPr sz="2600" b="0">
+              <a:rPr sz="2000" b="0">
                 <a:solidFill>
-                  <a:srgbClr val="E8ECF2"/>
+                  <a:srgbClr val="6B6B66"/>
                 </a:solidFill>
-                <a:latin typeface="Helvetica Neue"/>
+                <a:latin typeface="Arial"/>
               </a:rPr>
-              <a:t>Large suites are slow, and nobody knows which tests cover which code.</a:t>
-            </a:r>
-          </a:p>
-          <a:p>
-            <a:pPr algn="l">
-              <a:spcAft>
-                <a:spcPts val="1600"/>
-              </a:spcAft>
-            </a:pPr>
-            <a:r>
-              <a:rPr sz="2600" b="0">
-                <a:solidFill>
-                  <a:srgbClr val="E8ECF2"/>
-                </a:solidFill>
-                <a:latin typeface="Helvetica Neue"/>
-              </a:rPr>
-              <a:t>Dead tests linger, quietly wasting every run.</a:t>
-            </a:r>
-          </a:p>
-          <a:p>
-            <a:pPr algn="l">
-              <a:spcAft>
-                <a:spcPts val="1600"/>
-              </a:spcAft>
-            </a:pPr>
-            <a:r>
-              <a:rPr sz="2600" b="0">
-                <a:solidFill>
-                  <a:srgbClr val="E8ECF2"/>
-                </a:solidFill>
-                <a:latin typeface="Helvetica Neue"/>
-              </a:rPr>
-              <a:t>Real coverage gaps go unnoticed until something breaks.</a:t>
+              <a:t>Thousands of tests, years of turnover, no one left who remembers what each one was for. Tracking coverage by hand stopped being realistic a long time ago.</a:t>
             </a:r>
           </a:p>
         </p:txBody>
@@ -3614,9 +4012,17 @@
 </p:sld>
 </file>
 
-<file path=ppt/slides/slide4.xml><?xml version="1.0" encoding="utf-8"?>
+<file path=ppt/slides/slide6.xml><?xml version="1.0" encoding="utf-8"?>
 <p:sld xmlns:a="http://schemas.openxmlformats.org/drawingml/2006/main" xmlns:p="http://schemas.openxmlformats.org/presentationml/2006/main" xmlns:r="http://schemas.openxmlformats.org/officeDocument/2006/relationships">
   <p:cSld>
+    <p:bg>
+      <p:bgPr>
+        <a:solidFill>
+          <a:srgbClr val="FAF9F6"/>
+        </a:solidFill>
+        <a:effectLst/>
+      </p:bgPr>
+    </p:bg>
     <p:spTree>
       <p:nvGrpSpPr>
         <p:cNvPr id="1" name=""/>
@@ -3626,20 +4032,65 @@
       <p:grpSpPr/>
       <p:sp>
         <p:nvSpPr>
-          <p:cNvPr id="2" name="Rectangle 1"/>
+          <p:cNvPr id="2" name="TextBox 1"/>
+          <p:cNvSpPr txBox="1"/>
+          <p:nvPr/>
+        </p:nvSpPr>
+        <p:spPr>
+          <a:xfrm>
+            <a:off x="914400" y="777240"/>
+            <a:ext cx="10362895" cy="914400"/>
+          </a:xfrm>
+          <a:prstGeom prst="rect">
+            <a:avLst/>
+          </a:prstGeom>
+          <a:noFill/>
+        </p:spPr>
+        <p:txBody>
+          <a:bodyPr wrap="square" lIns="0" rIns="0" tIns="0" bIns="0">
+            <a:spAutoFit/>
+          </a:bodyPr>
+          <a:lstStyle/>
+          <a:p>
+            <a:pPr algn="ctr">
+              <a:lnSpc>
+                <a:spcPct val="115000"/>
+              </a:lnSpc>
+              <a:spcBef>
+                <a:spcPts val="0"/>
+              </a:spcBef>
+              <a:spcAft>
+                <a:spcPts val="0"/>
+              </a:spcAft>
+            </a:pPr>
+            <a:r>
+              <a:rPr sz="4000" b="1">
+                <a:solidFill>
+                  <a:srgbClr val="1A1A1A"/>
+                </a:solidFill>
+                <a:latin typeface="Arial"/>
+              </a:rPr>
+              <a:t>How it works</a:t>
+            </a:r>
+          </a:p>
+        </p:txBody>
+      </p:sp>
+      <p:sp>
+        <p:nvSpPr>
+          <p:cNvPr id="3" name="Rectangle 2"/>
           <p:cNvSpPr/>
           <p:nvPr/>
         </p:nvSpPr>
         <p:spPr>
           <a:xfrm>
-            <a:off x="0" y="0"/>
-            <a:ext cx="12191695" cy="6858000"/>
+            <a:off x="5455767" y="1691640"/>
+            <a:ext cx="1280160" cy="57150"/>
           </a:xfrm>
           <a:prstGeom prst="rect">
             <a:avLst/>
           </a:prstGeom>
           <a:solidFill>
-            <a:srgbClr val="121621"/>
+            <a:srgbClr val="C2410C"/>
           </a:solidFill>
           <a:ln>
             <a:noFill/>
@@ -3670,20 +4121,20 @@
       </p:sp>
       <p:sp>
         <p:nvSpPr>
-          <p:cNvPr id="3" name="Rectangle 2"/>
+          <p:cNvPr id="4" name="Oval 3"/>
           <p:cNvSpPr/>
           <p:nvPr/>
         </p:nvSpPr>
         <p:spPr>
           <a:xfrm>
-            <a:off x="822960" y="1051560"/>
-            <a:ext cx="1005840" cy="76200"/>
+            <a:off x="2109063" y="2514600"/>
+            <a:ext cx="566928" cy="566928"/>
           </a:xfrm>
-          <a:prstGeom prst="rect">
+          <a:prstGeom prst="ellipse">
             <a:avLst/>
           </a:prstGeom>
           <a:solidFill>
-            <a:srgbClr val="4FD1C5"/>
+            <a:srgbClr val="C2410C"/>
           </a:solidFill>
           <a:ln>
             <a:noFill/>
@@ -3708,20 +4159,39 @@
           <a:bodyPr rtlCol="0" anchor="ctr"/>
           <a:lstStyle/>
           <a:p>
-            <a:pPr algn="ctr"/>
-          </a:p>
-        </p:txBody>
-      </p:sp>
-      <p:sp>
-        <p:nvSpPr>
-          <p:cNvPr id="4" name="TextBox 3"/>
+            <a:pPr algn="ctr">
+              <a:lnSpc>
+                <a:spcPct val="115000"/>
+              </a:lnSpc>
+              <a:spcBef>
+                <a:spcPts val="0"/>
+              </a:spcBef>
+              <a:spcAft>
+                <a:spcPts val="0"/>
+              </a:spcAft>
+            </a:pPr>
+            <a:r>
+              <a:rPr sz="2000" b="1">
+                <a:solidFill>
+                  <a:srgbClr val="FFF6EE"/>
+                </a:solidFill>
+                <a:latin typeface="Arial"/>
+              </a:rPr>
+              <a:t>1</a:t>
+            </a:r>
+          </a:p>
+        </p:txBody>
+      </p:sp>
+      <p:sp>
+        <p:nvSpPr>
+          <p:cNvPr id="5" name="TextBox 4"/>
           <p:cNvSpPr txBox="1"/>
           <p:nvPr/>
         </p:nvSpPr>
         <p:spPr>
           <a:xfrm>
-            <a:off x="822960" y="1371600"/>
-            <a:ext cx="10515600" cy="4114800"/>
+            <a:off x="792327" y="3383280"/>
+            <a:ext cx="3200400" cy="2011680"/>
           </a:xfrm>
           <a:prstGeom prst="rect">
             <a:avLst/>
@@ -3729,94 +4199,72 @@
           <a:noFill/>
         </p:spPr>
         <p:txBody>
-          <a:bodyPr wrap="square" anchor="t">
+          <a:bodyPr wrap="square" lIns="0" rIns="0" tIns="0" bIns="0">
             <a:spAutoFit/>
           </a:bodyPr>
           <a:lstStyle/>
           <a:p>
-            <a:pPr algn="l">
+            <a:pPr algn="ctr">
+              <a:lnSpc>
+                <a:spcPct val="115000"/>
+              </a:lnSpc>
+              <a:spcBef>
+                <a:spcPts val="0"/>
+              </a:spcBef>
               <a:spcAft>
-                <a:spcPts val="3000"/>
+                <a:spcPts val="0"/>
               </a:spcAft>
             </a:pPr>
             <a:r>
-              <a:rPr sz="4600" b="1">
+              <a:rPr sz="2000" b="1">
                 <a:solidFill>
-                  <a:srgbClr val="E8ECF2"/>
+                  <a:srgbClr val="1A1A1A"/>
                 </a:solidFill>
-                <a:latin typeface="Helvetica Neue"/>
+                <a:latin typeface="Arial"/>
               </a:rPr>
-              <a:t>Watch one run. Draw the real map.</a:t>
-            </a:r>
-          </a:p>
-          <a:p>
-            <a:pPr algn="l">
+              <a:t>Run it</a:t>
+            </a:r>
+          </a:p>
+          <a:p>
+            <a:pPr algn="ctr">
+              <a:lnSpc>
+                <a:spcPct val="130000"/>
+              </a:lnSpc>
+              <a:spcBef>
+                <a:spcPts val="1200"/>
+              </a:spcBef>
               <a:spcAft>
-                <a:spcPts val="1800"/>
+                <a:spcPts val="0"/>
               </a:spcAft>
             </a:pPr>
             <a:r>
-              <a:rPr sz="2800" b="0">
+              <a:rPr sz="1600" b="0">
                 <a:solidFill>
-                  <a:srgbClr val="E8ECF2"/>
+                  <a:srgbClr val="C2410C"/>
                 </a:solidFill>
-                <a:latin typeface="Helvetica Neue"/>
+                <a:latin typeface="Consolas"/>
               </a:rPr>
-              <a:t>Marrow instruments a single test run and produces a test → code coverage map.</a:t>
-            </a:r>
-          </a:p>
-          <a:p>
-            <a:pPr algn="l">
-              <a:spcAft>
-                <a:spcPts val="1000"/>
-              </a:spcAft>
-            </a:pPr>
-            <a:r>
-              <a:rPr sz="2800" b="1">
-                <a:solidFill>
-                  <a:srgbClr val="4FD1C5"/>
-                </a:solidFill>
-                <a:latin typeface="Helvetica Neue"/>
-              </a:rPr>
-              <a:t>No annotations. No config.</a:t>
-            </a:r>
-          </a:p>
-        </p:txBody>
-      </p:sp>
-    </p:spTree>
-  </p:cSld>
-  <p:clrMapOvr>
-    <a:masterClrMapping/>
-  </p:clrMapOvr>
-</p:sld>
-</file>
-
-<file path=ppt/slides/slide5.xml><?xml version="1.0" encoding="utf-8"?>
-<p:sld xmlns:a="http://schemas.openxmlformats.org/drawingml/2006/main" xmlns:p="http://schemas.openxmlformats.org/presentationml/2006/main" xmlns:r="http://schemas.openxmlformats.org/officeDocument/2006/relationships">
-  <p:cSld>
-    <p:spTree>
-      <p:nvGrpSpPr>
-        <p:cNvPr id="1" name=""/>
-        <p:cNvGrpSpPr/>
-        <p:nvPr/>
-      </p:nvGrpSpPr>
-      <p:grpSpPr/>
-      <p:sp>
-        <p:nvSpPr>
-          <p:cNvPr id="2" name="Rectangle 1"/>
+              <a:t>marrow watch -- &lt;your test cmd&gt;</a:t>
+            </a:r>
+          </a:p>
+        </p:txBody>
+      </p:sp>
+      <p:sp>
+        <p:nvSpPr>
+          <p:cNvPr id="6" name="Oval 5"/>
           <p:cNvSpPr/>
           <p:nvPr/>
         </p:nvSpPr>
         <p:spPr>
           <a:xfrm>
-            <a:off x="0" y="0"/>
-            <a:ext cx="12191695" cy="6858000"/>
+            <a:off x="5812383" y="2514600"/>
+            <a:ext cx="566928" cy="566928"/>
           </a:xfrm>
-          <a:prstGeom prst="rect">
+          <a:prstGeom prst="ellipse">
             <a:avLst/>
           </a:prstGeom>
           <a:solidFill>
-            <a:srgbClr val="121621"/>
+            <a:srgbClr val="C2410C"/>
           </a:solidFill>
           <a:ln>
             <a:noFill/>
@@ -3841,26 +4289,112 @@
           <a:bodyPr rtlCol="0" anchor="ctr"/>
           <a:lstStyle/>
           <a:p>
-            <a:pPr algn="ctr"/>
-          </a:p>
-        </p:txBody>
-      </p:sp>
-      <p:sp>
-        <p:nvSpPr>
-          <p:cNvPr id="3" name="Rectangle 2"/>
-          <p:cNvSpPr/>
+            <a:pPr algn="ctr">
+              <a:lnSpc>
+                <a:spcPct val="115000"/>
+              </a:lnSpc>
+              <a:spcBef>
+                <a:spcPts val="0"/>
+              </a:spcBef>
+              <a:spcAft>
+                <a:spcPts val="0"/>
+              </a:spcAft>
+            </a:pPr>
+            <a:r>
+              <a:rPr sz="2000" b="1">
+                <a:solidFill>
+                  <a:srgbClr val="FFF6EE"/>
+                </a:solidFill>
+                <a:latin typeface="Arial"/>
+              </a:rPr>
+              <a:t>2</a:t>
+            </a:r>
+          </a:p>
+        </p:txBody>
+      </p:sp>
+      <p:sp>
+        <p:nvSpPr>
+          <p:cNvPr id="7" name="TextBox 6"/>
+          <p:cNvSpPr txBox="1"/>
           <p:nvPr/>
         </p:nvSpPr>
         <p:spPr>
           <a:xfrm>
-            <a:off x="822960" y="1051560"/>
-            <a:ext cx="1005840" cy="76200"/>
+            <a:off x="4495647" y="3383280"/>
+            <a:ext cx="3200400" cy="2011680"/>
           </a:xfrm>
           <a:prstGeom prst="rect">
             <a:avLst/>
           </a:prstGeom>
+          <a:noFill/>
+        </p:spPr>
+        <p:txBody>
+          <a:bodyPr wrap="square" lIns="0" rIns="0" tIns="0" bIns="0">
+            <a:spAutoFit/>
+          </a:bodyPr>
+          <a:lstStyle/>
+          <a:p>
+            <a:pPr algn="ctr">
+              <a:lnSpc>
+                <a:spcPct val="115000"/>
+              </a:lnSpc>
+              <a:spcBef>
+                <a:spcPts val="0"/>
+              </a:spcBef>
+              <a:spcAft>
+                <a:spcPts val="0"/>
+              </a:spcAft>
+            </a:pPr>
+            <a:r>
+              <a:rPr sz="2000" b="1">
+                <a:solidFill>
+                  <a:srgbClr val="1A1A1A"/>
+                </a:solidFill>
+                <a:latin typeface="Arial"/>
+              </a:rPr>
+              <a:t>It records</a:t>
+            </a:r>
+          </a:p>
+          <a:p>
+            <a:pPr algn="ctr">
+              <a:lnSpc>
+                <a:spcPct val="130000"/>
+              </a:lnSpc>
+              <a:spcBef>
+                <a:spcPts val="1200"/>
+              </a:spcBef>
+              <a:spcAft>
+                <a:spcPts val="0"/>
+              </a:spcAft>
+            </a:pPr>
+            <a:r>
+              <a:rPr sz="1900" b="0">
+                <a:solidFill>
+                  <a:srgbClr val="6B6B66"/>
+                </a:solidFill>
+                <a:latin typeface="Arial"/>
+              </a:rPr>
+              <a:t>Which lines each test actually exercised.</a:t>
+            </a:r>
+          </a:p>
+        </p:txBody>
+      </p:sp>
+      <p:sp>
+        <p:nvSpPr>
+          <p:cNvPr id="8" name="Oval 7"/>
+          <p:cNvSpPr/>
+          <p:nvPr/>
+        </p:nvSpPr>
+        <p:spPr>
+          <a:xfrm>
+            <a:off x="9515703" y="2514600"/>
+            <a:ext cx="566928" cy="566928"/>
+          </a:xfrm>
+          <a:prstGeom prst="ellipse">
+            <a:avLst/>
+          </a:prstGeom>
           <a:solidFill>
-            <a:srgbClr val="4FD1C5"/>
+            <a:srgbClr val="C2410C"/>
           </a:solidFill>
           <a:ln>
             <a:noFill/>
@@ -3885,20 +4419,39 @@
           <a:bodyPr rtlCol="0" anchor="ctr"/>
           <a:lstStyle/>
           <a:p>
-            <a:pPr algn="ctr"/>
-          </a:p>
-        </p:txBody>
-      </p:sp>
-      <p:sp>
-        <p:nvSpPr>
-          <p:cNvPr id="4" name="TextBox 3"/>
+            <a:pPr algn="ctr">
+              <a:lnSpc>
+                <a:spcPct val="115000"/>
+              </a:lnSpc>
+              <a:spcBef>
+                <a:spcPts val="0"/>
+              </a:spcBef>
+              <a:spcAft>
+                <a:spcPts val="0"/>
+              </a:spcAft>
+            </a:pPr>
+            <a:r>
+              <a:rPr sz="2000" b="1">
+                <a:solidFill>
+                  <a:srgbClr val="FFF6EE"/>
+                </a:solidFill>
+                <a:latin typeface="Arial"/>
+              </a:rPr>
+              <a:t>3</a:t>
+            </a:r>
+          </a:p>
+        </p:txBody>
+      </p:sp>
+      <p:sp>
+        <p:nvSpPr>
+          <p:cNvPr id="9" name="TextBox 8"/>
           <p:cNvSpPr txBox="1"/>
           <p:nvPr/>
         </p:nvSpPr>
         <p:spPr>
           <a:xfrm>
-            <a:off x="822960" y="1371600"/>
-            <a:ext cx="10515600" cy="4114800"/>
+            <a:off x="8198967" y="3383280"/>
+            <a:ext cx="3200400" cy="2011680"/>
           </a:xfrm>
           <a:prstGeom prst="rect">
             <a:avLst/>
@@ -3906,319 +4459,52 @@
           <a:noFill/>
         </p:spPr>
         <p:txBody>
-          <a:bodyPr wrap="square" anchor="t">
+          <a:bodyPr wrap="square" lIns="0" rIns="0" tIns="0" bIns="0">
             <a:spAutoFit/>
           </a:bodyPr>
           <a:lstStyle/>
           <a:p>
-            <a:pPr algn="l">
+            <a:pPr algn="ctr">
+              <a:lnSpc>
+                <a:spcPct val="115000"/>
+              </a:lnSpc>
+              <a:spcBef>
+                <a:spcPts val="0"/>
+              </a:spcBef>
               <a:spcAft>
-                <a:spcPts val="3000"/>
+                <a:spcPts val="0"/>
               </a:spcAft>
             </a:pPr>
             <a:r>
-              <a:rPr sz="4600" b="1">
+              <a:rPr sz="2000" b="1">
                 <a:solidFill>
-                  <a:srgbClr val="E8ECF2"/>
+                  <a:srgbClr val="1A1A1A"/>
                 </a:solidFill>
-                <a:latin typeface="Helvetica Neue"/>
+                <a:latin typeface="Arial"/>
               </a:rPr>
-              <a:t>Why now</a:t>
-            </a:r>
-          </a:p>
-          <a:p>
-            <a:pPr algn="l">
+              <a:t>It maps</a:t>
+            </a:r>
+          </a:p>
+          <a:p>
+            <a:pPr algn="ctr">
+              <a:lnSpc>
+                <a:spcPct val="130000"/>
+              </a:lnSpc>
+              <a:spcBef>
+                <a:spcPts val="1200"/>
+              </a:spcBef>
               <a:spcAft>
-                <a:spcPts val="1800"/>
+                <a:spcPts val="0"/>
               </a:spcAft>
             </a:pPr>
             <a:r>
-              <a:rPr sz="2800" b="0">
+              <a:rPr sz="1900" b="0">
                 <a:solidFill>
-                  <a:srgbClr val="E8ECF2"/>
+                  <a:srgbClr val="6B6B66"/>
                 </a:solidFill>
-                <a:latin typeface="Helvetica Neue"/>
+                <a:latin typeface="Arial"/>
               </a:rPr>
-              <a:t>Test suites have grown into the thousands — too large to hold in anyone's head.</a:t>
-            </a:r>
-          </a:p>
-          <a:p>
-            <a:pPr algn="l">
-              <a:spcAft>
-                <a:spcPts val="1800"/>
-              </a:spcAft>
-            </a:pPr>
-            <a:r>
-              <a:rPr sz="2800" b="0">
-                <a:solidFill>
-                  <a:srgbClr val="E8ECF2"/>
-                </a:solidFill>
-                <a:latin typeface="Helvetica Neue"/>
-              </a:rPr>
-              <a:t>Manual coverage tracking has become untenable; spreadsheets and guesswork no longer scale.</a:t>
-            </a:r>
-          </a:p>
-          <a:p>
-            <a:pPr algn="l">
-              <a:spcAft>
-                <a:spcPts val="1000"/>
-              </a:spcAft>
-            </a:pPr>
-            <a:r>
-              <a:rPr sz="2800" b="1">
-                <a:solidFill>
-                  <a:srgbClr val="4FD1C5"/>
-                </a:solidFill>
-                <a:latin typeface="Helvetica Neue"/>
-              </a:rPr>
-              <a:t>The map has to be generated automatically — that's the only way it stays true.</a:t>
-            </a:r>
-          </a:p>
-        </p:txBody>
-      </p:sp>
-    </p:spTree>
-  </p:cSld>
-  <p:clrMapOvr>
-    <a:masterClrMapping/>
-  </p:clrMapOvr>
-</p:sld>
-</file>
-
-<file path=ppt/slides/slide6.xml><?xml version="1.0" encoding="utf-8"?>
-<p:sld xmlns:a="http://schemas.openxmlformats.org/drawingml/2006/main" xmlns:p="http://schemas.openxmlformats.org/presentationml/2006/main" xmlns:r="http://schemas.openxmlformats.org/officeDocument/2006/relationships">
-  <p:cSld>
-    <p:spTree>
-      <p:nvGrpSpPr>
-        <p:cNvPr id="1" name=""/>
-        <p:cNvGrpSpPr/>
-        <p:nvPr/>
-      </p:nvGrpSpPr>
-      <p:grpSpPr/>
-      <p:sp>
-        <p:nvSpPr>
-          <p:cNvPr id="2" name="Rectangle 1"/>
-          <p:cNvSpPr/>
-          <p:nvPr/>
-        </p:nvSpPr>
-        <p:spPr>
-          <a:xfrm>
-            <a:off x="0" y="0"/>
-            <a:ext cx="12191695" cy="6858000"/>
-          </a:xfrm>
-          <a:prstGeom prst="rect">
-            <a:avLst/>
-          </a:prstGeom>
-          <a:solidFill>
-            <a:srgbClr val="121621"/>
-          </a:solidFill>
-          <a:ln>
-            <a:noFill/>
-          </a:ln>
-          <a:effectLst/>
-        </p:spPr>
-        <p:style>
-          <a:lnRef idx="1">
-            <a:schemeClr val="accent1"/>
-          </a:lnRef>
-          <a:fillRef idx="3">
-            <a:schemeClr val="accent1"/>
-          </a:fillRef>
-          <a:effectRef idx="2">
-            <a:schemeClr val="accent1"/>
-          </a:effectRef>
-          <a:fontRef idx="minor">
-            <a:schemeClr val="lt1"/>
-          </a:fontRef>
-        </p:style>
-        <p:txBody>
-          <a:bodyPr rtlCol="0" anchor="ctr"/>
-          <a:lstStyle/>
-          <a:p>
-            <a:pPr algn="ctr"/>
-          </a:p>
-        </p:txBody>
-      </p:sp>
-      <p:sp>
-        <p:nvSpPr>
-          <p:cNvPr id="3" name="Rectangle 2"/>
-          <p:cNvSpPr/>
-          <p:nvPr/>
-        </p:nvSpPr>
-        <p:spPr>
-          <a:xfrm>
-            <a:off x="822960" y="1051560"/>
-            <a:ext cx="1005840" cy="76200"/>
-          </a:xfrm>
-          <a:prstGeom prst="rect">
-            <a:avLst/>
-          </a:prstGeom>
-          <a:solidFill>
-            <a:srgbClr val="4FD1C5"/>
-          </a:solidFill>
-          <a:ln>
-            <a:noFill/>
-          </a:ln>
-          <a:effectLst/>
-        </p:spPr>
-        <p:style>
-          <a:lnRef idx="1">
-            <a:schemeClr val="accent1"/>
-          </a:lnRef>
-          <a:fillRef idx="3">
-            <a:schemeClr val="accent1"/>
-          </a:fillRef>
-          <a:effectRef idx="2">
-            <a:schemeClr val="accent1"/>
-          </a:effectRef>
-          <a:fontRef idx="minor">
-            <a:schemeClr val="lt1"/>
-          </a:fontRef>
-        </p:style>
-        <p:txBody>
-          <a:bodyPr rtlCol="0" anchor="ctr"/>
-          <a:lstStyle/>
-          <a:p>
-            <a:pPr algn="ctr"/>
-          </a:p>
-        </p:txBody>
-      </p:sp>
-      <p:sp>
-        <p:nvSpPr>
-          <p:cNvPr id="4" name="TextBox 3"/>
-          <p:cNvSpPr txBox="1"/>
-          <p:nvPr/>
-        </p:nvSpPr>
-        <p:spPr>
-          <a:xfrm>
-            <a:off x="822960" y="1371600"/>
-            <a:ext cx="10515600" cy="4572000"/>
-          </a:xfrm>
-          <a:prstGeom prst="rect">
-            <a:avLst/>
-          </a:prstGeom>
-          <a:noFill/>
-        </p:spPr>
-        <p:txBody>
-          <a:bodyPr wrap="square" anchor="t">
-            <a:spAutoFit/>
-          </a:bodyPr>
-          <a:lstStyle/>
-          <a:p>
-            <a:pPr algn="l">
-              <a:spcAft>
-                <a:spcPts val="3000"/>
-              </a:spcAft>
-            </a:pPr>
-            <a:r>
-              <a:rPr sz="4600" b="1">
-                <a:solidFill>
-                  <a:srgbClr val="E8ECF2"/>
-                </a:solidFill>
-                <a:latin typeface="Helvetica Neue"/>
-              </a:rPr>
-              <a:t>How it works</a:t>
-            </a:r>
-          </a:p>
-          <a:p>
-            <a:pPr>
-              <a:spcAft>
-                <a:spcPts val="1800"/>
-              </a:spcAft>
-            </a:pPr>
-            <a:r>
-              <a:rPr sz="2600" b="1">
-                <a:solidFill>
-                  <a:srgbClr val="4FD1C5"/>
-                </a:solidFill>
-                <a:latin typeface="Helvetica Neue"/>
-              </a:rPr>
-              <a:t>1  </a:t>
-            </a:r>
-            <a:r>
-              <a:rPr sz="2600" b="1">
-                <a:solidFill>
-                  <a:srgbClr val="E8ECF2"/>
-                </a:solidFill>
-                <a:latin typeface="Helvetica Neue"/>
-              </a:rPr>
-              <a:t>Run — </a:t>
-            </a:r>
-            <a:r>
-              <a:rPr sz="2400">
-                <a:solidFill>
-                  <a:srgbClr val="9AA6B8"/>
-                </a:solidFill>
-                <a:latin typeface="Menlo"/>
-              </a:rPr>
-              <a:t>marrow watch -- &lt;your test cmd&gt;</a:t>
-            </a:r>
-          </a:p>
-          <a:p>
-            <a:pPr>
-              <a:spcAft>
-                <a:spcPts val="1800"/>
-              </a:spcAft>
-            </a:pPr>
-            <a:r>
-              <a:rPr sz="2600" b="1">
-                <a:solidFill>
-                  <a:srgbClr val="4FD1C5"/>
-                </a:solidFill>
-                <a:latin typeface="Helvetica Neue"/>
-              </a:rPr>
-              <a:t>2  </a:t>
-            </a:r>
-            <a:r>
-              <a:rPr sz="2600" b="1">
-                <a:solidFill>
-                  <a:srgbClr val="E8ECF2"/>
-                </a:solidFill>
-                <a:latin typeface="Helvetica Neue"/>
-              </a:rPr>
-              <a:t>Record — </a:t>
-            </a:r>
-            <a:r>
-              <a:rPr sz="2400">
-                <a:solidFill>
-                  <a:srgbClr val="E8ECF2"/>
-                </a:solidFill>
-                <a:latin typeface="Helvetica Neue"/>
-              </a:rPr>
-              <a:t>Marrow captures which lines each test exercised.</a:t>
-            </a:r>
-          </a:p>
-          <a:p>
-            <a:pPr>
-              <a:spcAft>
-                <a:spcPts val="1800"/>
-              </a:spcAft>
-            </a:pPr>
-            <a:r>
-              <a:rPr sz="2600" b="1">
-                <a:solidFill>
-                  <a:srgbClr val="4FD1C5"/>
-                </a:solidFill>
-                <a:latin typeface="Helvetica Neue"/>
-              </a:rPr>
-              <a:t>3  </a:t>
-            </a:r>
-            <a:r>
-              <a:rPr sz="2600" b="1">
-                <a:solidFill>
-                  <a:srgbClr val="E8ECF2"/>
-                </a:solidFill>
-                <a:latin typeface="Helvetica Neue"/>
-              </a:rPr>
-              <a:t>Map — </a:t>
-            </a:r>
-            <a:r>
-              <a:rPr sz="2400">
-                <a:solidFill>
-                  <a:srgbClr val="E8ECF2"/>
-                </a:solidFill>
-                <a:latin typeface="Helvetica Neue"/>
-              </a:rPr>
-              <a:t>It emits an interactive map plus dead tests and untested lines.</a:t>
+              <a:t>An interactive map, plus dead tests and untested lines.</a:t>
             </a:r>
           </a:p>
         </p:txBody>

--- a/harness/out/pptx/pitch_deck_reorder/warm/deck.pptx
+++ b/harness/out/pptx/pitch_deck_reorder/warm/deck.pptx
@@ -3086,14 +3086,6 @@
 <file path=ppt/slides/slide1.xml><?xml version="1.0" encoding="utf-8"?>
 <p:sld xmlns:a="http://schemas.openxmlformats.org/drawingml/2006/main" xmlns:p="http://schemas.openxmlformats.org/presentationml/2006/main" xmlns:r="http://schemas.openxmlformats.org/officeDocument/2006/relationships">
   <p:cSld>
-    <p:bg>
-      <p:bgPr>
-        <a:solidFill>
-          <a:srgbClr val="FAF9F6"/>
-        </a:solidFill>
-        <a:effectLst/>
-      </p:bgPr>
-    </p:bg>
     <p:spTree>
       <p:nvGrpSpPr>
         <p:cNvPr id="1" name=""/>
@@ -3103,65 +3095,20 @@
       <p:grpSpPr/>
       <p:sp>
         <p:nvSpPr>
-          <p:cNvPr id="2" name="TextBox 1"/>
-          <p:cNvSpPr txBox="1"/>
-          <p:nvPr/>
-        </p:nvSpPr>
-        <p:spPr>
-          <a:xfrm>
-            <a:off x="914400" y="2240280"/>
-            <a:ext cx="10362895" cy="1463040"/>
-          </a:xfrm>
-          <a:prstGeom prst="rect">
-            <a:avLst/>
-          </a:prstGeom>
-          <a:noFill/>
-        </p:spPr>
-        <p:txBody>
-          <a:bodyPr wrap="square" lIns="0" rIns="0" tIns="0" bIns="0">
-            <a:spAutoFit/>
-          </a:bodyPr>
-          <a:lstStyle/>
-          <a:p>
-            <a:pPr algn="ctr">
-              <a:lnSpc>
-                <a:spcPct val="115000"/>
-              </a:lnSpc>
-              <a:spcBef>
-                <a:spcPts val="0"/>
-              </a:spcBef>
-              <a:spcAft>
-                <a:spcPts val="0"/>
-              </a:spcAft>
-            </a:pPr>
-            <a:r>
-              <a:rPr sz="7200" b="1">
-                <a:solidFill>
-                  <a:srgbClr val="1A1A1A"/>
-                </a:solidFill>
-                <a:latin typeface="Arial"/>
-              </a:rPr>
-              <a:t>Marrow</a:t>
-            </a:r>
-          </a:p>
-        </p:txBody>
-      </p:sp>
-      <p:sp>
-        <p:nvSpPr>
-          <p:cNvPr id="3" name="Rectangle 2"/>
+          <p:cNvPr id="2" name="Rectangle 1"/>
           <p:cNvSpPr/>
           <p:nvPr/>
         </p:nvSpPr>
         <p:spPr>
           <a:xfrm>
-            <a:off x="5181447" y="3703320"/>
-            <a:ext cx="1828800" cy="57150"/>
+            <a:off x="0" y="0"/>
+            <a:ext cx="12191695" cy="6858000"/>
           </a:xfrm>
           <a:prstGeom prst="rect">
             <a:avLst/>
           </a:prstGeom>
           <a:solidFill>
-            <a:srgbClr val="C2410C"/>
+            <a:srgbClr val="F7F6F3"/>
           </a:solidFill>
           <a:ln>
             <a:noFill/>
@@ -3192,14 +3139,14 @@
       </p:sp>
       <p:sp>
         <p:nvSpPr>
-          <p:cNvPr id="4" name="TextBox 3"/>
+          <p:cNvPr id="3" name="TextBox 2"/>
           <p:cNvSpPr txBox="1"/>
           <p:nvPr/>
         </p:nvSpPr>
         <p:spPr>
           <a:xfrm>
-            <a:off x="914400" y="4160520"/>
-            <a:ext cx="10362895" cy="822960"/>
+            <a:off x="1005840" y="2286000"/>
+            <a:ext cx="10180015" cy="1737360"/>
           </a:xfrm>
           <a:prstGeom prst="rect">
             <a:avLst/>
@@ -3224,104 +3171,33 @@
               </a:spcAft>
             </a:pPr>
             <a:r>
-              <a:rPr sz="2200" b="0">
+              <a:rPr sz="7600" b="1">
                 <a:solidFill>
-                  <a:srgbClr val="6B6B66"/>
+                  <a:srgbClr val="1A1A1A"/>
                 </a:solidFill>
-                <a:latin typeface="Arial"/>
+                <a:latin typeface="Helvetica Neue"/>
               </a:rPr>
-              <a:t>Know what your tests actually cover.</a:t>
-            </a:r>
-          </a:p>
-        </p:txBody>
-      </p:sp>
-    </p:spTree>
-  </p:cSld>
-  <p:clrMapOvr>
-    <a:masterClrMapping/>
-  </p:clrMapOvr>
-</p:sld>
-</file>
-
-<file path=ppt/slides/slide2.xml><?xml version="1.0" encoding="utf-8"?>
-<p:sld xmlns:a="http://schemas.openxmlformats.org/drawingml/2006/main" xmlns:p="http://schemas.openxmlformats.org/presentationml/2006/main" xmlns:r="http://schemas.openxmlformats.org/officeDocument/2006/relationships">
-  <p:cSld>
-    <p:bg>
-      <p:bgPr>
-        <a:solidFill>
-          <a:srgbClr val="C2410C"/>
-        </a:solidFill>
-        <a:effectLst/>
-      </p:bgPr>
-    </p:bg>
-    <p:spTree>
-      <p:nvGrpSpPr>
-        <p:cNvPr id="1" name=""/>
-        <p:cNvGrpSpPr/>
-        <p:nvPr/>
-      </p:nvGrpSpPr>
-      <p:grpSpPr/>
-      <p:sp>
-        <p:nvSpPr>
-          <p:cNvPr id="2" name="TextBox 1"/>
-          <p:cNvSpPr txBox="1"/>
-          <p:nvPr/>
-        </p:nvSpPr>
-        <p:spPr>
-          <a:xfrm>
-            <a:off x="914400" y="777240"/>
-            <a:ext cx="10362895" cy="914400"/>
-          </a:xfrm>
-          <a:prstGeom prst="rect">
-            <a:avLst/>
-          </a:prstGeom>
-          <a:noFill/>
-        </p:spPr>
-        <p:txBody>
-          <a:bodyPr wrap="square" lIns="0" rIns="0" tIns="0" bIns="0">
-            <a:spAutoFit/>
-          </a:bodyPr>
-          <a:lstStyle/>
-          <a:p>
-            <a:pPr algn="ctr">
-              <a:lnSpc>
-                <a:spcPct val="115000"/>
-              </a:lnSpc>
-              <a:spcBef>
-                <a:spcPts val="0"/>
-              </a:spcBef>
-              <a:spcAft>
-                <a:spcPts val="0"/>
-              </a:spcAft>
-            </a:pPr>
-            <a:r>
-              <a:rPr sz="4000" b="1">
-                <a:solidFill>
-                  <a:srgbClr val="FFF6EE"/>
-                </a:solidFill>
-                <a:latin typeface="Arial"/>
-              </a:rPr>
-              <a:t>Install Marrow</a:t>
-            </a:r>
-          </a:p>
-        </p:txBody>
-      </p:sp>
-      <p:sp>
-        <p:nvSpPr>
-          <p:cNvPr id="3" name="Rectangle 2"/>
+              <a:t>Marrow</a:t>
+            </a:r>
+          </a:p>
+        </p:txBody>
+      </p:sp>
+      <p:sp>
+        <p:nvSpPr>
+          <p:cNvPr id="4" name="Rectangle 3"/>
           <p:cNvSpPr/>
           <p:nvPr/>
         </p:nvSpPr>
         <p:spPr>
           <a:xfrm>
-            <a:off x="5455767" y="1691640"/>
-            <a:ext cx="1280160" cy="57150"/>
+            <a:off x="5090007" y="3794760"/>
+            <a:ext cx="2011680" cy="63500"/>
           </a:xfrm>
           <a:prstGeom prst="rect">
             <a:avLst/>
           </a:prstGeom>
           <a:solidFill>
-            <a:srgbClr val="FFF6EE"/>
+            <a:srgbClr val="0F7A6C"/>
           </a:solidFill>
           <a:ln>
             <a:noFill/>
@@ -3352,20 +3228,83 @@
       </p:sp>
       <p:sp>
         <p:nvSpPr>
-          <p:cNvPr id="4" name="Rounded Rectangle 3"/>
+          <p:cNvPr id="5" name="TextBox 4"/>
+          <p:cNvSpPr txBox="1"/>
+          <p:nvPr/>
+        </p:nvSpPr>
+        <p:spPr>
+          <a:xfrm>
+            <a:off x="1005840" y="4206240"/>
+            <a:ext cx="10180015" cy="822960"/>
+          </a:xfrm>
+          <a:prstGeom prst="rect">
+            <a:avLst/>
+          </a:prstGeom>
+          <a:noFill/>
+        </p:spPr>
+        <p:txBody>
+          <a:bodyPr wrap="square" lIns="0" rIns="0" tIns="0" bIns="0">
+            <a:spAutoFit/>
+          </a:bodyPr>
+          <a:lstStyle/>
+          <a:p>
+            <a:pPr algn="ctr">
+              <a:lnSpc>
+                <a:spcPct val="115000"/>
+              </a:lnSpc>
+              <a:spcBef>
+                <a:spcPts val="0"/>
+              </a:spcBef>
+              <a:spcAft>
+                <a:spcPts val="0"/>
+              </a:spcAft>
+            </a:pPr>
+            <a:r>
+              <a:rPr sz="2800" b="0">
+                <a:solidFill>
+                  <a:srgbClr val="5F5C57"/>
+                </a:solidFill>
+                <a:latin typeface="Helvetica Neue"/>
+              </a:rPr>
+              <a:t>Know what your tests actually cover.</a:t>
+            </a:r>
+          </a:p>
+        </p:txBody>
+      </p:sp>
+    </p:spTree>
+  </p:cSld>
+  <p:clrMapOvr>
+    <a:masterClrMapping/>
+  </p:clrMapOvr>
+</p:sld>
+</file>
+
+<file path=ppt/slides/slide2.xml><?xml version="1.0" encoding="utf-8"?>
+<p:sld xmlns:a="http://schemas.openxmlformats.org/drawingml/2006/main" xmlns:p="http://schemas.openxmlformats.org/presentationml/2006/main" xmlns:r="http://schemas.openxmlformats.org/officeDocument/2006/relationships">
+  <p:cSld>
+    <p:spTree>
+      <p:nvGrpSpPr>
+        <p:cNvPr id="1" name=""/>
+        <p:cNvGrpSpPr/>
+        <p:nvPr/>
+      </p:nvGrpSpPr>
+      <p:grpSpPr/>
+      <p:sp>
+        <p:nvSpPr>
+          <p:cNvPr id="2" name="Rectangle 1"/>
           <p:cNvSpPr/>
           <p:nvPr/>
         </p:nvSpPr>
         <p:spPr>
           <a:xfrm>
-            <a:off x="3169767" y="2606040"/>
-            <a:ext cx="5852160" cy="1234440"/>
-          </a:xfrm>
-          <a:prstGeom prst="roundRect">
+            <a:off x="0" y="0"/>
+            <a:ext cx="12191695" cy="6858000"/>
+          </a:xfrm>
+          <a:prstGeom prst="rect">
             <a:avLst/>
           </a:prstGeom>
           <a:solidFill>
-            <a:srgbClr val="8C2D07"/>
+            <a:srgbClr val="F7F6F3"/>
           </a:solidFill>
           <a:ln>
             <a:noFill/>
@@ -3387,7 +3326,33 @@
           </a:fontRef>
         </p:style>
         <p:txBody>
-          <a:bodyPr rtlCol="0" anchor="ctr" wrap="square"/>
+          <a:bodyPr rtlCol="0" anchor="ctr"/>
+          <a:lstStyle/>
+          <a:p>
+            <a:pPr algn="ctr"/>
+          </a:p>
+        </p:txBody>
+      </p:sp>
+      <p:sp>
+        <p:nvSpPr>
+          <p:cNvPr id="3" name="TextBox 2"/>
+          <p:cNvSpPr txBox="1"/>
+          <p:nvPr/>
+        </p:nvSpPr>
+        <p:spPr>
+          <a:xfrm>
+            <a:off x="1005840" y="777240"/>
+            <a:ext cx="10180015" cy="1005840"/>
+          </a:xfrm>
+          <a:prstGeom prst="rect">
+            <a:avLst/>
+          </a:prstGeom>
+          <a:noFill/>
+        </p:spPr>
+        <p:txBody>
+          <a:bodyPr wrap="square" lIns="0" rIns="0" tIns="0" bIns="0">
+            <a:spAutoFit/>
+          </a:bodyPr>
           <a:lstStyle/>
           <a:p>
             <a:pPr algn="ctr">
@@ -3402,149 +3367,33 @@
               </a:spcAft>
             </a:pPr>
             <a:r>
-              <a:rPr sz="2400" b="1">
-                <a:solidFill>
-                  <a:srgbClr val="FFF6EE"/>
-                </a:solidFill>
-                <a:latin typeface="Consolas"/>
-              </a:rPr>
-              <a:t>pipx install marrow</a:t>
-            </a:r>
-          </a:p>
-        </p:txBody>
-      </p:sp>
-      <p:sp>
-        <p:nvSpPr>
-          <p:cNvPr id="5" name="TextBox 4"/>
-          <p:cNvSpPr txBox="1"/>
-          <p:nvPr/>
-        </p:nvSpPr>
-        <p:spPr>
-          <a:xfrm>
-            <a:off x="914400" y="4343400"/>
-            <a:ext cx="10362895" cy="914400"/>
-          </a:xfrm>
-          <a:prstGeom prst="rect">
-            <a:avLst/>
-          </a:prstGeom>
-          <a:noFill/>
-        </p:spPr>
-        <p:txBody>
-          <a:bodyPr wrap="square" lIns="0" rIns="0" tIns="0" bIns="0">
-            <a:spAutoFit/>
-          </a:bodyPr>
-          <a:lstStyle/>
-          <a:p>
-            <a:pPr algn="ctr">
-              <a:lnSpc>
-                <a:spcPct val="115000"/>
-              </a:lnSpc>
-              <a:spcBef>
-                <a:spcPts val="0"/>
-              </a:spcBef>
-              <a:spcAft>
-                <a:spcPts val="0"/>
-              </a:spcAft>
-            </a:pPr>
-            <a:r>
-              <a:rPr sz="2000" b="0">
-                <a:solidFill>
-                  <a:srgbClr val="FFF6EE"/>
-                </a:solidFill>
-                <a:latin typeface="Arial"/>
-              </a:rPr>
-              <a:t>Works with pytest, Jest, go test.</a:t>
-            </a:r>
-          </a:p>
-        </p:txBody>
-      </p:sp>
-    </p:spTree>
-  </p:cSld>
-  <p:clrMapOvr>
-    <a:masterClrMapping/>
-  </p:clrMapOvr>
-</p:sld>
-</file>
-
-<file path=ppt/slides/slide3.xml><?xml version="1.0" encoding="utf-8"?>
-<p:sld xmlns:a="http://schemas.openxmlformats.org/drawingml/2006/main" xmlns:p="http://schemas.openxmlformats.org/presentationml/2006/main" xmlns:r="http://schemas.openxmlformats.org/officeDocument/2006/relationships">
-  <p:cSld>
-    <p:bg>
-      <p:bgPr>
-        <a:solidFill>
-          <a:srgbClr val="FAF9F6"/>
-        </a:solidFill>
-        <a:effectLst/>
-      </p:bgPr>
-    </p:bg>
-    <p:spTree>
-      <p:nvGrpSpPr>
-        <p:cNvPr id="1" name=""/>
-        <p:cNvGrpSpPr/>
-        <p:nvPr/>
-      </p:nvGrpSpPr>
-      <p:grpSpPr/>
-      <p:sp>
-        <p:nvSpPr>
-          <p:cNvPr id="2" name="TextBox 1"/>
-          <p:cNvSpPr txBox="1"/>
-          <p:nvPr/>
-        </p:nvSpPr>
-        <p:spPr>
-          <a:xfrm>
-            <a:off x="914400" y="777240"/>
-            <a:ext cx="10362895" cy="914400"/>
-          </a:xfrm>
-          <a:prstGeom prst="rect">
-            <a:avLst/>
-          </a:prstGeom>
-          <a:noFill/>
-        </p:spPr>
-        <p:txBody>
-          <a:bodyPr wrap="square" lIns="0" rIns="0" tIns="0" bIns="0">
-            <a:spAutoFit/>
-          </a:bodyPr>
-          <a:lstStyle/>
-          <a:p>
-            <a:pPr algn="ctr">
-              <a:lnSpc>
-                <a:spcPct val="115000"/>
-              </a:lnSpc>
-              <a:spcBef>
-                <a:spcPts val="0"/>
-              </a:spcBef>
-              <a:spcAft>
-                <a:spcPts val="0"/>
-              </a:spcAft>
-            </a:pPr>
-            <a:r>
-              <a:rPr sz="4000" b="1">
+              <a:rPr sz="4400" b="1">
                 <a:solidFill>
                   <a:srgbClr val="1A1A1A"/>
                 </a:solidFill>
-                <a:latin typeface="Arial"/>
+                <a:latin typeface="Helvetica Neue"/>
               </a:rPr>
-              <a:t>Big test suites hide their gaps.</a:t>
-            </a:r>
-          </a:p>
-        </p:txBody>
-      </p:sp>
-      <p:sp>
-        <p:nvSpPr>
-          <p:cNvPr id="3" name="Rectangle 2"/>
+              <a:t>Install Marrow</a:t>
+            </a:r>
+          </a:p>
+        </p:txBody>
+      </p:sp>
+      <p:sp>
+        <p:nvSpPr>
+          <p:cNvPr id="4" name="Rectangle 3"/>
           <p:cNvSpPr/>
           <p:nvPr/>
         </p:nvSpPr>
         <p:spPr>
           <a:xfrm>
-            <a:off x="5455767" y="1691640"/>
-            <a:ext cx="1280160" cy="57150"/>
+            <a:off x="5364327" y="1874519"/>
+            <a:ext cx="1463040" cy="63500"/>
           </a:xfrm>
           <a:prstGeom prst="rect">
             <a:avLst/>
           </a:prstGeom>
           <a:solidFill>
-            <a:srgbClr val="C2410C"/>
+            <a:srgbClr val="0F7A6C"/>
           </a:solidFill>
           <a:ln>
             <a:noFill/>
@@ -3575,161 +3424,25 @@
       </p:sp>
       <p:sp>
         <p:nvSpPr>
-          <p:cNvPr id="4" name="TextBox 3"/>
-          <p:cNvSpPr txBox="1"/>
-          <p:nvPr/>
-        </p:nvSpPr>
-        <p:spPr>
-          <a:xfrm>
-            <a:off x="1828800" y="2606040"/>
-            <a:ext cx="8534095" cy="2194560"/>
-          </a:xfrm>
-          <a:prstGeom prst="rect">
-            <a:avLst/>
-          </a:prstGeom>
-          <a:noFill/>
-        </p:spPr>
-        <p:txBody>
-          <a:bodyPr wrap="square" lIns="0" rIns="0" tIns="0" bIns="0">
-            <a:spAutoFit/>
-          </a:bodyPr>
-          <a:lstStyle/>
-          <a:p>
-            <a:pPr algn="ctr">
-              <a:lnSpc>
-                <a:spcPct val="135000"/>
-              </a:lnSpc>
-              <a:spcBef>
-                <a:spcPts val="0"/>
-              </a:spcBef>
-              <a:spcAft>
-                <a:spcPts val="0"/>
-              </a:spcAft>
-            </a:pPr>
-            <a:r>
-              <a:rPr sz="2000" b="0">
-                <a:solidFill>
-                  <a:srgbClr val="1A1A1A"/>
-                </a:solidFill>
-                <a:latin typeface="Arial"/>
-              </a:rPr>
-              <a:t>Large suites are slow, and nobody knows which tests cover which code.</a:t>
-            </a:r>
-          </a:p>
-          <a:p>
-            <a:pPr algn="ctr">
-              <a:lnSpc>
-                <a:spcPct val="135000"/>
-              </a:lnSpc>
-              <a:spcBef>
-                <a:spcPts val="1800"/>
-              </a:spcBef>
-              <a:spcAft>
-                <a:spcPts val="0"/>
-              </a:spcAft>
-            </a:pPr>
-            <a:r>
-              <a:rPr sz="2000" b="0">
-                <a:solidFill>
-                  <a:srgbClr val="6B6B66"/>
-                </a:solidFill>
-                <a:latin typeface="Arial"/>
-              </a:rPr>
-              <a:t>So dead tests linger, and real gaps go unnoticed.</a:t>
-            </a:r>
-          </a:p>
-        </p:txBody>
-      </p:sp>
-    </p:spTree>
-  </p:cSld>
-  <p:clrMapOvr>
-    <a:masterClrMapping/>
-  </p:clrMapOvr>
-</p:sld>
-</file>
-
-<file path=ppt/slides/slide4.xml><?xml version="1.0" encoding="utf-8"?>
-<p:sld xmlns:a="http://schemas.openxmlformats.org/drawingml/2006/main" xmlns:p="http://schemas.openxmlformats.org/presentationml/2006/main" xmlns:r="http://schemas.openxmlformats.org/officeDocument/2006/relationships">
-  <p:cSld>
-    <p:bg>
-      <p:bgPr>
-        <a:solidFill>
-          <a:srgbClr val="FAF9F6"/>
-        </a:solidFill>
-        <a:effectLst/>
-      </p:bgPr>
-    </p:bg>
-    <p:spTree>
-      <p:nvGrpSpPr>
-        <p:cNvPr id="1" name=""/>
-        <p:cNvGrpSpPr/>
-        <p:nvPr/>
-      </p:nvGrpSpPr>
-      <p:grpSpPr/>
-      <p:sp>
-        <p:nvSpPr>
-          <p:cNvPr id="2" name="TextBox 1"/>
-          <p:cNvSpPr txBox="1"/>
-          <p:nvPr/>
-        </p:nvSpPr>
-        <p:spPr>
-          <a:xfrm>
-            <a:off x="914400" y="777240"/>
-            <a:ext cx="10362895" cy="914400"/>
-          </a:xfrm>
-          <a:prstGeom prst="rect">
-            <a:avLst/>
-          </a:prstGeom>
-          <a:noFill/>
-        </p:spPr>
-        <p:txBody>
-          <a:bodyPr wrap="square" lIns="0" rIns="0" tIns="0" bIns="0">
-            <a:spAutoFit/>
-          </a:bodyPr>
-          <a:lstStyle/>
-          <a:p>
-            <a:pPr algn="ctr">
-              <a:lnSpc>
-                <a:spcPct val="115000"/>
-              </a:lnSpc>
-              <a:spcBef>
-                <a:spcPts val="0"/>
-              </a:spcBef>
-              <a:spcAft>
-                <a:spcPts val="0"/>
-              </a:spcAft>
-            </a:pPr>
-            <a:r>
-              <a:rPr sz="4000" b="1">
-                <a:solidFill>
-                  <a:srgbClr val="1A1A1A"/>
-                </a:solidFill>
-                <a:latin typeface="Arial"/>
-              </a:rPr>
-              <a:t>Watch one run. Draw the real map.</a:t>
-            </a:r>
-          </a:p>
-        </p:txBody>
-      </p:sp>
-      <p:sp>
-        <p:nvSpPr>
-          <p:cNvPr id="3" name="Rectangle 2"/>
+          <p:cNvPr id="5" name="Rectangle 4"/>
           <p:cNvSpPr/>
           <p:nvPr/>
         </p:nvSpPr>
         <p:spPr>
           <a:xfrm>
-            <a:off x="5455767" y="1691640"/>
-            <a:ext cx="1280160" cy="57150"/>
+            <a:off x="3108960" y="2743200"/>
+            <a:ext cx="5973775" cy="1188720"/>
           </a:xfrm>
           <a:prstGeom prst="rect">
             <a:avLst/>
           </a:prstGeom>
           <a:solidFill>
-            <a:srgbClr val="C2410C"/>
+            <a:srgbClr val="ECEAE4"/>
           </a:solidFill>
-          <a:ln>
-            <a:noFill/>
+          <a:ln w="19050">
+            <a:solidFill>
+              <a:srgbClr val="0F7A6C"/>
+            </a:solidFill>
           </a:ln>
           <a:effectLst/>
         </p:spPr>
@@ -3748,126 +3461,7 @@
           </a:fontRef>
         </p:style>
         <p:txBody>
-          <a:bodyPr rtlCol="0" anchor="ctr"/>
-          <a:lstStyle/>
-          <a:p>
-            <a:pPr algn="ctr"/>
-          </a:p>
-        </p:txBody>
-      </p:sp>
-      <p:sp>
-        <p:nvSpPr>
-          <p:cNvPr id="4" name="TextBox 3"/>
-          <p:cNvSpPr txBox="1"/>
-          <p:nvPr/>
-        </p:nvSpPr>
-        <p:spPr>
-          <a:xfrm>
-            <a:off x="1828800" y="2606040"/>
-            <a:ext cx="8534095" cy="2194560"/>
-          </a:xfrm>
-          <a:prstGeom prst="rect">
-            <a:avLst/>
-          </a:prstGeom>
-          <a:noFill/>
-        </p:spPr>
-        <p:txBody>
-          <a:bodyPr wrap="square" lIns="0" rIns="0" tIns="0" bIns="0">
-            <a:spAutoFit/>
-          </a:bodyPr>
-          <a:lstStyle/>
-          <a:p>
-            <a:pPr algn="ctr">
-              <a:lnSpc>
-                <a:spcPct val="135000"/>
-              </a:lnSpc>
-              <a:spcBef>
-                <a:spcPts val="0"/>
-              </a:spcBef>
-              <a:spcAft>
-                <a:spcPts val="0"/>
-              </a:spcAft>
-            </a:pPr>
-            <a:r>
-              <a:rPr sz="2000" b="0">
-                <a:solidFill>
-                  <a:srgbClr val="1A1A1A"/>
-                </a:solidFill>
-                <a:latin typeface="Arial"/>
-              </a:rPr>
-              <a:t>Marrow instruments a single test run and produces a test → code coverage map.</a:t>
-            </a:r>
-          </a:p>
-          <a:p>
-            <a:pPr algn="ctr">
-              <a:lnSpc>
-                <a:spcPct val="135000"/>
-              </a:lnSpc>
-              <a:spcBef>
-                <a:spcPts val="1800"/>
-              </a:spcBef>
-              <a:spcAft>
-                <a:spcPts val="0"/>
-              </a:spcAft>
-            </a:pPr>
-            <a:r>
-              <a:rPr sz="2000" b="1">
-                <a:solidFill>
-                  <a:srgbClr val="C2410C"/>
-                </a:solidFill>
-                <a:latin typeface="Arial"/>
-              </a:rPr>
-              <a:t>No annotations. No config.</a:t>
-            </a:r>
-          </a:p>
-        </p:txBody>
-      </p:sp>
-    </p:spTree>
-  </p:cSld>
-  <p:clrMapOvr>
-    <a:masterClrMapping/>
-  </p:clrMapOvr>
-</p:sld>
-</file>
-
-<file path=ppt/slides/slide5.xml><?xml version="1.0" encoding="utf-8"?>
-<p:sld xmlns:a="http://schemas.openxmlformats.org/drawingml/2006/main" xmlns:p="http://schemas.openxmlformats.org/presentationml/2006/main" xmlns:r="http://schemas.openxmlformats.org/officeDocument/2006/relationships">
-  <p:cSld>
-    <p:bg>
-      <p:bgPr>
-        <a:solidFill>
-          <a:srgbClr val="FAF9F6"/>
-        </a:solidFill>
-        <a:effectLst/>
-      </p:bgPr>
-    </p:bg>
-    <p:spTree>
-      <p:nvGrpSpPr>
-        <p:cNvPr id="1" name=""/>
-        <p:cNvGrpSpPr/>
-        <p:nvPr/>
-      </p:nvGrpSpPr>
-      <p:grpSpPr/>
-      <p:sp>
-        <p:nvSpPr>
-          <p:cNvPr id="2" name="TextBox 1"/>
-          <p:cNvSpPr txBox="1"/>
-          <p:nvPr/>
-        </p:nvSpPr>
-        <p:spPr>
-          <a:xfrm>
-            <a:off x="914400" y="777240"/>
-            <a:ext cx="10362895" cy="914400"/>
-          </a:xfrm>
-          <a:prstGeom prst="rect">
-            <a:avLst/>
-          </a:prstGeom>
-          <a:noFill/>
-        </p:spPr>
-        <p:txBody>
-          <a:bodyPr wrap="square" lIns="0" rIns="0" tIns="0" bIns="0">
-            <a:spAutoFit/>
-          </a:bodyPr>
+          <a:bodyPr rtlCol="0" anchor="ctr" wrap="square"/>
           <a:lstStyle/>
           <a:p>
             <a:pPr algn="ctr">
@@ -3882,33 +3476,96 @@
               </a:spcAft>
             </a:pPr>
             <a:r>
-              <a:rPr sz="4000" b="1">
+              <a:rPr sz="3400" b="1">
                 <a:solidFill>
                   <a:srgbClr val="1A1A1A"/>
                 </a:solidFill>
-                <a:latin typeface="Arial"/>
+                <a:latin typeface="Menlo"/>
               </a:rPr>
-              <a:t>Why now</a:t>
-            </a:r>
-          </a:p>
-        </p:txBody>
-      </p:sp>
-      <p:sp>
-        <p:nvSpPr>
-          <p:cNvPr id="3" name="Rectangle 2"/>
+              <a:t>pipx install marrow</a:t>
+            </a:r>
+          </a:p>
+        </p:txBody>
+      </p:sp>
+      <p:sp>
+        <p:nvSpPr>
+          <p:cNvPr id="6" name="TextBox 5"/>
+          <p:cNvSpPr txBox="1"/>
+          <p:nvPr/>
+        </p:nvSpPr>
+        <p:spPr>
+          <a:xfrm>
+            <a:off x="1005840" y="4343400"/>
+            <a:ext cx="10180015" cy="822960"/>
+          </a:xfrm>
+          <a:prstGeom prst="rect">
+            <a:avLst/>
+          </a:prstGeom>
+          <a:noFill/>
+        </p:spPr>
+        <p:txBody>
+          <a:bodyPr wrap="square" lIns="0" rIns="0" tIns="0" bIns="0">
+            <a:spAutoFit/>
+          </a:bodyPr>
+          <a:lstStyle/>
+          <a:p>
+            <a:pPr algn="ctr">
+              <a:lnSpc>
+                <a:spcPct val="115000"/>
+              </a:lnSpc>
+              <a:spcBef>
+                <a:spcPts val="0"/>
+              </a:spcBef>
+              <a:spcAft>
+                <a:spcPts val="0"/>
+              </a:spcAft>
+            </a:pPr>
+            <a:r>
+              <a:rPr sz="2800" b="0">
+                <a:solidFill>
+                  <a:srgbClr val="0F7A6C"/>
+                </a:solidFill>
+                <a:latin typeface="Helvetica Neue"/>
+              </a:rPr>
+              <a:t>Works with pytest, Jest, go test.</a:t>
+            </a:r>
+          </a:p>
+        </p:txBody>
+      </p:sp>
+    </p:spTree>
+  </p:cSld>
+  <p:clrMapOvr>
+    <a:masterClrMapping/>
+  </p:clrMapOvr>
+</p:sld>
+</file>
+
+<file path=ppt/slides/slide3.xml><?xml version="1.0" encoding="utf-8"?>
+<p:sld xmlns:a="http://schemas.openxmlformats.org/drawingml/2006/main" xmlns:p="http://schemas.openxmlformats.org/presentationml/2006/main" xmlns:r="http://schemas.openxmlformats.org/officeDocument/2006/relationships">
+  <p:cSld>
+    <p:spTree>
+      <p:nvGrpSpPr>
+        <p:cNvPr id="1" name=""/>
+        <p:cNvGrpSpPr/>
+        <p:nvPr/>
+      </p:nvGrpSpPr>
+      <p:grpSpPr/>
+      <p:sp>
+        <p:nvSpPr>
+          <p:cNvPr id="2" name="Rectangle 1"/>
           <p:cNvSpPr/>
           <p:nvPr/>
         </p:nvSpPr>
         <p:spPr>
           <a:xfrm>
-            <a:off x="5455767" y="1691640"/>
-            <a:ext cx="1280160" cy="57150"/>
+            <a:off x="0" y="0"/>
+            <a:ext cx="12191695" cy="6858000"/>
           </a:xfrm>
           <a:prstGeom prst="rect">
             <a:avLst/>
           </a:prstGeom>
           <a:solidFill>
-            <a:srgbClr val="C2410C"/>
+            <a:srgbClr val="F7F6F3"/>
           </a:solidFill>
           <a:ln>
             <a:noFill/>
@@ -3939,107 +3596,14 @@
       </p:sp>
       <p:sp>
         <p:nvSpPr>
-          <p:cNvPr id="4" name="TextBox 3"/>
+          <p:cNvPr id="3" name="TextBox 2"/>
           <p:cNvSpPr txBox="1"/>
           <p:nvPr/>
         </p:nvSpPr>
         <p:spPr>
           <a:xfrm>
-            <a:off x="1828800" y="2606040"/>
-            <a:ext cx="8534095" cy="2377440"/>
-          </a:xfrm>
-          <a:prstGeom prst="rect">
-            <a:avLst/>
-          </a:prstGeom>
-          <a:noFill/>
-        </p:spPr>
-        <p:txBody>
-          <a:bodyPr wrap="square" lIns="0" rIns="0" tIns="0" bIns="0">
-            <a:spAutoFit/>
-          </a:bodyPr>
-          <a:lstStyle/>
-          <a:p>
-            <a:pPr algn="ctr">
-              <a:lnSpc>
-                <a:spcPct val="135000"/>
-              </a:lnSpc>
-              <a:spcBef>
-                <a:spcPts val="0"/>
-              </a:spcBef>
-              <a:spcAft>
-                <a:spcPts val="0"/>
-              </a:spcAft>
-            </a:pPr>
-            <a:r>
-              <a:rPr sz="2000" b="1">
-                <a:solidFill>
-                  <a:srgbClr val="1A1A1A"/>
-                </a:solidFill>
-                <a:latin typeface="Arial"/>
-              </a:rPr>
-              <a:t>Test suites have outgrown the humans maintaining them.</a:t>
-            </a:r>
-          </a:p>
-          <a:p>
-            <a:pPr algn="ctr">
-              <a:lnSpc>
-                <a:spcPct val="135000"/>
-              </a:lnSpc>
-              <a:spcBef>
-                <a:spcPts val="1800"/>
-              </a:spcBef>
-              <a:spcAft>
-                <a:spcPts val="0"/>
-              </a:spcAft>
-            </a:pPr>
-            <a:r>
-              <a:rPr sz="2000" b="0">
-                <a:solidFill>
-                  <a:srgbClr val="6B6B66"/>
-                </a:solidFill>
-                <a:latin typeface="Arial"/>
-              </a:rPr>
-              <a:t>Thousands of tests, years of turnover, no one left who remembers what each one was for. Tracking coverage by hand stopped being realistic a long time ago.</a:t>
-            </a:r>
-          </a:p>
-        </p:txBody>
-      </p:sp>
-    </p:spTree>
-  </p:cSld>
-  <p:clrMapOvr>
-    <a:masterClrMapping/>
-  </p:clrMapOvr>
-</p:sld>
-</file>
-
-<file path=ppt/slides/slide6.xml><?xml version="1.0" encoding="utf-8"?>
-<p:sld xmlns:a="http://schemas.openxmlformats.org/drawingml/2006/main" xmlns:p="http://schemas.openxmlformats.org/presentationml/2006/main" xmlns:r="http://schemas.openxmlformats.org/officeDocument/2006/relationships">
-  <p:cSld>
-    <p:bg>
-      <p:bgPr>
-        <a:solidFill>
-          <a:srgbClr val="FAF9F6"/>
-        </a:solidFill>
-        <a:effectLst/>
-      </p:bgPr>
-    </p:bg>
-    <p:spTree>
-      <p:nvGrpSpPr>
-        <p:cNvPr id="1" name=""/>
-        <p:cNvGrpSpPr/>
-        <p:nvPr/>
-      </p:nvGrpSpPr>
-      <p:grpSpPr/>
-      <p:sp>
-        <p:nvSpPr>
-          <p:cNvPr id="2" name="TextBox 1"/>
-          <p:cNvSpPr txBox="1"/>
-          <p:nvPr/>
-        </p:nvSpPr>
-        <p:spPr>
-          <a:xfrm>
-            <a:off x="914400" y="777240"/>
-            <a:ext cx="10362895" cy="914400"/>
+            <a:off x="1005840" y="777240"/>
+            <a:ext cx="10180015" cy="1005840"/>
           </a:xfrm>
           <a:prstGeom prst="rect">
             <a:avLst/>
@@ -4064,33 +3628,33 @@
               </a:spcAft>
             </a:pPr>
             <a:r>
-              <a:rPr sz="4000" b="1">
+              <a:rPr sz="4400" b="1">
                 <a:solidFill>
                   <a:srgbClr val="1A1A1A"/>
                 </a:solidFill>
-                <a:latin typeface="Arial"/>
+                <a:latin typeface="Helvetica Neue"/>
               </a:rPr>
-              <a:t>How it works</a:t>
-            </a:r>
-          </a:p>
-        </p:txBody>
-      </p:sp>
-      <p:sp>
-        <p:nvSpPr>
-          <p:cNvPr id="3" name="Rectangle 2"/>
+              <a:t>Big test suites hide their gaps.</a:t>
+            </a:r>
+          </a:p>
+        </p:txBody>
+      </p:sp>
+      <p:sp>
+        <p:nvSpPr>
+          <p:cNvPr id="4" name="Rectangle 3"/>
           <p:cNvSpPr/>
           <p:nvPr/>
         </p:nvSpPr>
         <p:spPr>
           <a:xfrm>
-            <a:off x="5455767" y="1691640"/>
-            <a:ext cx="1280160" cy="57150"/>
+            <a:off x="5364327" y="1874519"/>
+            <a:ext cx="1463040" cy="63500"/>
           </a:xfrm>
           <a:prstGeom prst="rect">
             <a:avLst/>
           </a:prstGeom>
           <a:solidFill>
-            <a:srgbClr val="C2410C"/>
+            <a:srgbClr val="0F7A6C"/>
           </a:solidFill>
           <a:ln>
             <a:noFill/>
@@ -4121,20 +3685,127 @@
       </p:sp>
       <p:sp>
         <p:nvSpPr>
-          <p:cNvPr id="4" name="Oval 3"/>
+          <p:cNvPr id="5" name="TextBox 4"/>
+          <p:cNvSpPr txBox="1"/>
+          <p:nvPr/>
+        </p:nvSpPr>
+        <p:spPr>
+          <a:xfrm>
+            <a:off x="1828800" y="2743200"/>
+            <a:ext cx="8534095" cy="2377440"/>
+          </a:xfrm>
+          <a:prstGeom prst="rect">
+            <a:avLst/>
+          </a:prstGeom>
+          <a:noFill/>
+        </p:spPr>
+        <p:txBody>
+          <a:bodyPr wrap="square" lIns="0" rIns="0" tIns="0" bIns="0">
+            <a:spAutoFit/>
+          </a:bodyPr>
+          <a:lstStyle/>
+          <a:p>
+            <a:pPr algn="l">
+              <a:lnSpc>
+                <a:spcPct val="115000"/>
+              </a:lnSpc>
+              <a:spcBef>
+                <a:spcPts val="0"/>
+              </a:spcBef>
+              <a:spcAft>
+                <a:spcPts val="2000"/>
+              </a:spcAft>
+            </a:pPr>
+            <a:r>
+              <a:rPr sz="2200" b="0">
+                <a:solidFill>
+                  <a:srgbClr val="1A1A1A"/>
+                </a:solidFill>
+                <a:latin typeface="Helvetica Neue"/>
+              </a:rPr>
+              <a:t>Large suites are slow, and nobody knows which tests cover which code.</a:t>
+            </a:r>
+          </a:p>
+          <a:p>
+            <a:pPr algn="l">
+              <a:lnSpc>
+                <a:spcPct val="115000"/>
+              </a:lnSpc>
+              <a:spcBef>
+                <a:spcPts val="0"/>
+              </a:spcBef>
+              <a:spcAft>
+                <a:spcPts val="2000"/>
+              </a:spcAft>
+            </a:pPr>
+            <a:r>
+              <a:rPr sz="2200" b="0">
+                <a:solidFill>
+                  <a:srgbClr val="5F5C57"/>
+                </a:solidFill>
+                <a:latin typeface="Helvetica Neue"/>
+              </a:rPr>
+              <a:t>Dead tests linger for years, quietly costing minutes on every run.</a:t>
+            </a:r>
+          </a:p>
+          <a:p>
+            <a:pPr algn="l">
+              <a:lnSpc>
+                <a:spcPct val="115000"/>
+              </a:lnSpc>
+              <a:spcBef>
+                <a:spcPts val="0"/>
+              </a:spcBef>
+              <a:spcAft>
+                <a:spcPts val="2000"/>
+              </a:spcAft>
+            </a:pPr>
+            <a:r>
+              <a:rPr sz="2200" b="0">
+                <a:solidFill>
+                  <a:srgbClr val="5F5C57"/>
+                </a:solidFill>
+                <a:latin typeface="Helvetica Neue"/>
+              </a:rPr>
+              <a:t>Real gaps go unnoticed until something breaks in production.</a:t>
+            </a:r>
+          </a:p>
+        </p:txBody>
+      </p:sp>
+    </p:spTree>
+  </p:cSld>
+  <p:clrMapOvr>
+    <a:masterClrMapping/>
+  </p:clrMapOvr>
+</p:sld>
+</file>
+
+<file path=ppt/slides/slide4.xml><?xml version="1.0" encoding="utf-8"?>
+<p:sld xmlns:a="http://schemas.openxmlformats.org/drawingml/2006/main" xmlns:p="http://schemas.openxmlformats.org/presentationml/2006/main" xmlns:r="http://schemas.openxmlformats.org/officeDocument/2006/relationships">
+  <p:cSld>
+    <p:spTree>
+      <p:nvGrpSpPr>
+        <p:cNvPr id="1" name=""/>
+        <p:cNvGrpSpPr/>
+        <p:nvPr/>
+      </p:nvGrpSpPr>
+      <p:grpSpPr/>
+      <p:sp>
+        <p:nvSpPr>
+          <p:cNvPr id="2" name="Rectangle 1"/>
           <p:cNvSpPr/>
           <p:nvPr/>
         </p:nvSpPr>
         <p:spPr>
           <a:xfrm>
-            <a:off x="2109063" y="2514600"/>
-            <a:ext cx="566928" cy="566928"/>
-          </a:xfrm>
-          <a:prstGeom prst="ellipse">
+            <a:off x="0" y="0"/>
+            <a:ext cx="12191695" cy="6858000"/>
+          </a:xfrm>
+          <a:prstGeom prst="rect">
             <a:avLst/>
           </a:prstGeom>
           <a:solidFill>
-            <a:srgbClr val="C2410C"/>
+            <a:srgbClr val="F7F6F3"/>
           </a:solidFill>
           <a:ln>
             <a:noFill/>
@@ -4159,6 +3830,32 @@
           <a:bodyPr rtlCol="0" anchor="ctr"/>
           <a:lstStyle/>
           <a:p>
+            <a:pPr algn="ctr"/>
+          </a:p>
+        </p:txBody>
+      </p:sp>
+      <p:sp>
+        <p:nvSpPr>
+          <p:cNvPr id="3" name="TextBox 2"/>
+          <p:cNvSpPr txBox="1"/>
+          <p:nvPr/>
+        </p:nvSpPr>
+        <p:spPr>
+          <a:xfrm>
+            <a:off x="1005840" y="777240"/>
+            <a:ext cx="10180015" cy="1005840"/>
+          </a:xfrm>
+          <a:prstGeom prst="rect">
+            <a:avLst/>
+          </a:prstGeom>
+          <a:noFill/>
+        </p:spPr>
+        <p:txBody>
+          <a:bodyPr wrap="square" lIns="0" rIns="0" tIns="0" bIns="0">
+            <a:spAutoFit/>
+          </a:bodyPr>
+          <a:lstStyle/>
+          <a:p>
             <a:pPr algn="ctr">
               <a:lnSpc>
                 <a:spcPct val="115000"/>
@@ -4171,100 +3868,33 @@
               </a:spcAft>
             </a:pPr>
             <a:r>
-              <a:rPr sz="2000" b="1">
+              <a:rPr sz="4400" b="1">
                 <a:solidFill>
-                  <a:srgbClr val="FFF6EE"/>
+                  <a:srgbClr val="1A1A1A"/>
                 </a:solidFill>
-                <a:latin typeface="Arial"/>
+                <a:latin typeface="Helvetica Neue"/>
               </a:rPr>
-              <a:t>1</a:t>
-            </a:r>
-          </a:p>
-        </p:txBody>
-      </p:sp>
-      <p:sp>
-        <p:nvSpPr>
-          <p:cNvPr id="5" name="TextBox 4"/>
-          <p:cNvSpPr txBox="1"/>
+              <a:t>Watch one run. Draw the real map.</a:t>
+            </a:r>
+          </a:p>
+        </p:txBody>
+      </p:sp>
+      <p:sp>
+        <p:nvSpPr>
+          <p:cNvPr id="4" name="Rectangle 3"/>
+          <p:cNvSpPr/>
           <p:nvPr/>
         </p:nvSpPr>
         <p:spPr>
           <a:xfrm>
-            <a:off x="792327" y="3383280"/>
-            <a:ext cx="3200400" cy="2011680"/>
+            <a:off x="5364327" y="1874519"/>
+            <a:ext cx="1463040" cy="63500"/>
           </a:xfrm>
           <a:prstGeom prst="rect">
             <a:avLst/>
           </a:prstGeom>
-          <a:noFill/>
-        </p:spPr>
-        <p:txBody>
-          <a:bodyPr wrap="square" lIns="0" rIns="0" tIns="0" bIns="0">
-            <a:spAutoFit/>
-          </a:bodyPr>
-          <a:lstStyle/>
-          <a:p>
-            <a:pPr algn="ctr">
-              <a:lnSpc>
-                <a:spcPct val="115000"/>
-              </a:lnSpc>
-              <a:spcBef>
-                <a:spcPts val="0"/>
-              </a:spcBef>
-              <a:spcAft>
-                <a:spcPts val="0"/>
-              </a:spcAft>
-            </a:pPr>
-            <a:r>
-              <a:rPr sz="2000" b="1">
-                <a:solidFill>
-                  <a:srgbClr val="1A1A1A"/>
-                </a:solidFill>
-                <a:latin typeface="Arial"/>
-              </a:rPr>
-              <a:t>Run it</a:t>
-            </a:r>
-          </a:p>
-          <a:p>
-            <a:pPr algn="ctr">
-              <a:lnSpc>
-                <a:spcPct val="130000"/>
-              </a:lnSpc>
-              <a:spcBef>
-                <a:spcPts val="1200"/>
-              </a:spcBef>
-              <a:spcAft>
-                <a:spcPts val="0"/>
-              </a:spcAft>
-            </a:pPr>
-            <a:r>
-              <a:rPr sz="1600" b="0">
-                <a:solidFill>
-                  <a:srgbClr val="C2410C"/>
-                </a:solidFill>
-                <a:latin typeface="Consolas"/>
-              </a:rPr>
-              <a:t>marrow watch -- &lt;your test cmd&gt;</a:t>
-            </a:r>
-          </a:p>
-        </p:txBody>
-      </p:sp>
-      <p:sp>
-        <p:nvSpPr>
-          <p:cNvPr id="6" name="Oval 5"/>
-          <p:cNvSpPr/>
-          <p:nvPr/>
-        </p:nvSpPr>
-        <p:spPr>
-          <a:xfrm>
-            <a:off x="5812383" y="2514600"/>
-            <a:ext cx="566928" cy="566928"/>
-          </a:xfrm>
-          <a:prstGeom prst="ellipse">
-            <a:avLst/>
-          </a:prstGeom>
           <a:solidFill>
-            <a:srgbClr val="C2410C"/>
+            <a:srgbClr val="0F7A6C"/>
           </a:solidFill>
           <a:ln>
             <a:noFill/>
@@ -4289,7 +3919,55 @@
           <a:bodyPr rtlCol="0" anchor="ctr"/>
           <a:lstStyle/>
           <a:p>
-            <a:pPr algn="ctr">
+            <a:pPr algn="ctr"/>
+          </a:p>
+        </p:txBody>
+      </p:sp>
+      <p:sp>
+        <p:nvSpPr>
+          <p:cNvPr id="5" name="TextBox 4"/>
+          <p:cNvSpPr txBox="1"/>
+          <p:nvPr/>
+        </p:nvSpPr>
+        <p:spPr>
+          <a:xfrm>
+            <a:off x="1828800" y="2834640"/>
+            <a:ext cx="8534095" cy="2194560"/>
+          </a:xfrm>
+          <a:prstGeom prst="rect">
+            <a:avLst/>
+          </a:prstGeom>
+          <a:noFill/>
+        </p:spPr>
+        <p:txBody>
+          <a:bodyPr wrap="square" lIns="0" rIns="0" tIns="0" bIns="0">
+            <a:spAutoFit/>
+          </a:bodyPr>
+          <a:lstStyle/>
+          <a:p>
+            <a:pPr algn="l">
+              <a:lnSpc>
+                <a:spcPct val="115000"/>
+              </a:lnSpc>
+              <a:spcBef>
+                <a:spcPts val="0"/>
+              </a:spcBef>
+              <a:spcAft>
+                <a:spcPts val="2600"/>
+              </a:spcAft>
+            </a:pPr>
+            <a:r>
+              <a:rPr sz="2800" b="0">
+                <a:solidFill>
+                  <a:srgbClr val="1A1A1A"/>
+                </a:solidFill>
+                <a:latin typeface="Helvetica Neue"/>
+              </a:rPr>
+              <a:t>Marrow instruments a single test run and produces a test→code coverage map.</a:t>
+            </a:r>
+          </a:p>
+          <a:p>
+            <a:pPr algn="l">
               <a:lnSpc>
                 <a:spcPct val="115000"/>
               </a:lnSpc>
@@ -4301,100 +3979,51 @@
               </a:spcAft>
             </a:pPr>
             <a:r>
-              <a:rPr sz="2000" b="1">
+              <a:rPr sz="2200" b="0">
                 <a:solidFill>
-                  <a:srgbClr val="FFF6EE"/>
+                  <a:srgbClr val="0F7A6C"/>
                 </a:solidFill>
-                <a:latin typeface="Arial"/>
+                <a:latin typeface="Helvetica Neue"/>
               </a:rPr>
-              <a:t>2</a:t>
-            </a:r>
-          </a:p>
-        </p:txBody>
-      </p:sp>
-      <p:sp>
-        <p:nvSpPr>
-          <p:cNvPr id="7" name="TextBox 6"/>
-          <p:cNvSpPr txBox="1"/>
+              <a:t>No annotations. No config. No rewriting your suite.</a:t>
+            </a:r>
+          </a:p>
+        </p:txBody>
+      </p:sp>
+    </p:spTree>
+  </p:cSld>
+  <p:clrMapOvr>
+    <a:masterClrMapping/>
+  </p:clrMapOvr>
+</p:sld>
+</file>
+
+<file path=ppt/slides/slide5.xml><?xml version="1.0" encoding="utf-8"?>
+<p:sld xmlns:a="http://schemas.openxmlformats.org/drawingml/2006/main" xmlns:p="http://schemas.openxmlformats.org/presentationml/2006/main" xmlns:r="http://schemas.openxmlformats.org/officeDocument/2006/relationships">
+  <p:cSld>
+    <p:spTree>
+      <p:nvGrpSpPr>
+        <p:cNvPr id="1" name=""/>
+        <p:cNvGrpSpPr/>
+        <p:nvPr/>
+      </p:nvGrpSpPr>
+      <p:grpSpPr/>
+      <p:sp>
+        <p:nvSpPr>
+          <p:cNvPr id="2" name="Rectangle 1"/>
+          <p:cNvSpPr/>
           <p:nvPr/>
         </p:nvSpPr>
         <p:spPr>
           <a:xfrm>
-            <a:off x="4495647" y="3383280"/>
-            <a:ext cx="3200400" cy="2011680"/>
+            <a:off x="0" y="0"/>
+            <a:ext cx="12191695" cy="6858000"/>
           </a:xfrm>
           <a:prstGeom prst="rect">
             <a:avLst/>
           </a:prstGeom>
-          <a:noFill/>
-        </p:spPr>
-        <p:txBody>
-          <a:bodyPr wrap="square" lIns="0" rIns="0" tIns="0" bIns="0">
-            <a:spAutoFit/>
-          </a:bodyPr>
-          <a:lstStyle/>
-          <a:p>
-            <a:pPr algn="ctr">
-              <a:lnSpc>
-                <a:spcPct val="115000"/>
-              </a:lnSpc>
-              <a:spcBef>
-                <a:spcPts val="0"/>
-              </a:spcBef>
-              <a:spcAft>
-                <a:spcPts val="0"/>
-              </a:spcAft>
-            </a:pPr>
-            <a:r>
-              <a:rPr sz="2000" b="1">
-                <a:solidFill>
-                  <a:srgbClr val="1A1A1A"/>
-                </a:solidFill>
-                <a:latin typeface="Arial"/>
-              </a:rPr>
-              <a:t>It records</a:t>
-            </a:r>
-          </a:p>
-          <a:p>
-            <a:pPr algn="ctr">
-              <a:lnSpc>
-                <a:spcPct val="130000"/>
-              </a:lnSpc>
-              <a:spcBef>
-                <a:spcPts val="1200"/>
-              </a:spcBef>
-              <a:spcAft>
-                <a:spcPts val="0"/>
-              </a:spcAft>
-            </a:pPr>
-            <a:r>
-              <a:rPr sz="1900" b="0">
-                <a:solidFill>
-                  <a:srgbClr val="6B6B66"/>
-                </a:solidFill>
-                <a:latin typeface="Arial"/>
-              </a:rPr>
-              <a:t>Which lines each test actually exercised.</a:t>
-            </a:r>
-          </a:p>
-        </p:txBody>
-      </p:sp>
-      <p:sp>
-        <p:nvSpPr>
-          <p:cNvPr id="8" name="Oval 7"/>
-          <p:cNvSpPr/>
-          <p:nvPr/>
-        </p:nvSpPr>
-        <p:spPr>
-          <a:xfrm>
-            <a:off x="9515703" y="2514600"/>
-            <a:ext cx="566928" cy="566928"/>
-          </a:xfrm>
-          <a:prstGeom prst="ellipse">
-            <a:avLst/>
-          </a:prstGeom>
           <a:solidFill>
-            <a:srgbClr val="C2410C"/>
+            <a:srgbClr val="F7F6F3"/>
           </a:solidFill>
           <a:ln>
             <a:noFill/>
@@ -4419,6 +4048,32 @@
           <a:bodyPr rtlCol="0" anchor="ctr"/>
           <a:lstStyle/>
           <a:p>
+            <a:pPr algn="ctr"/>
+          </a:p>
+        </p:txBody>
+      </p:sp>
+      <p:sp>
+        <p:nvSpPr>
+          <p:cNvPr id="3" name="TextBox 2"/>
+          <p:cNvSpPr txBox="1"/>
+          <p:nvPr/>
+        </p:nvSpPr>
+        <p:spPr>
+          <a:xfrm>
+            <a:off x="1005840" y="777240"/>
+            <a:ext cx="10180015" cy="1005840"/>
+          </a:xfrm>
+          <a:prstGeom prst="rect">
+            <a:avLst/>
+          </a:prstGeom>
+          <a:noFill/>
+        </p:spPr>
+        <p:txBody>
+          <a:bodyPr wrap="square" lIns="0" rIns="0" tIns="0" bIns="0">
+            <a:spAutoFit/>
+          </a:bodyPr>
+          <a:lstStyle/>
+          <a:p>
             <a:pPr algn="ctr">
               <a:lnSpc>
                 <a:spcPct val="115000"/>
@@ -4431,27 +4086,244 @@
               </a:spcAft>
             </a:pPr>
             <a:r>
-              <a:rPr sz="2000" b="1">
+              <a:rPr sz="4400" b="1">
                 <a:solidFill>
-                  <a:srgbClr val="FFF6EE"/>
+                  <a:srgbClr val="1A1A1A"/>
                 </a:solidFill>
-                <a:latin typeface="Arial"/>
+                <a:latin typeface="Helvetica Neue"/>
               </a:rPr>
-              <a:t>3</a:t>
-            </a:r>
-          </a:p>
-        </p:txBody>
-      </p:sp>
-      <p:sp>
-        <p:nvSpPr>
-          <p:cNvPr id="9" name="TextBox 8"/>
+              <a:t>Why now</a:t>
+            </a:r>
+          </a:p>
+        </p:txBody>
+      </p:sp>
+      <p:sp>
+        <p:nvSpPr>
+          <p:cNvPr id="4" name="Rectangle 3"/>
+          <p:cNvSpPr/>
+          <p:nvPr/>
+        </p:nvSpPr>
+        <p:spPr>
+          <a:xfrm>
+            <a:off x="5364327" y="1874519"/>
+            <a:ext cx="1463040" cy="63500"/>
+          </a:xfrm>
+          <a:prstGeom prst="rect">
+            <a:avLst/>
+          </a:prstGeom>
+          <a:solidFill>
+            <a:srgbClr val="0F7A6C"/>
+          </a:solidFill>
+          <a:ln>
+            <a:noFill/>
+          </a:ln>
+          <a:effectLst/>
+        </p:spPr>
+        <p:style>
+          <a:lnRef idx="1">
+            <a:schemeClr val="accent1"/>
+          </a:lnRef>
+          <a:fillRef idx="3">
+            <a:schemeClr val="accent1"/>
+          </a:fillRef>
+          <a:effectRef idx="2">
+            <a:schemeClr val="accent1"/>
+          </a:effectRef>
+          <a:fontRef idx="minor">
+            <a:schemeClr val="lt1"/>
+          </a:fontRef>
+        </p:style>
+        <p:txBody>
+          <a:bodyPr rtlCol="0" anchor="ctr"/>
+          <a:lstStyle/>
+          <a:p>
+            <a:pPr algn="ctr"/>
+          </a:p>
+        </p:txBody>
+      </p:sp>
+      <p:sp>
+        <p:nvSpPr>
+          <p:cNvPr id="5" name="TextBox 4"/>
           <p:cNvSpPr txBox="1"/>
           <p:nvPr/>
         </p:nvSpPr>
         <p:spPr>
           <a:xfrm>
-            <a:off x="8198967" y="3383280"/>
-            <a:ext cx="3200400" cy="2011680"/>
+            <a:off x="1828800" y="2697480"/>
+            <a:ext cx="8534095" cy="2743200"/>
+          </a:xfrm>
+          <a:prstGeom prst="rect">
+            <a:avLst/>
+          </a:prstGeom>
+          <a:noFill/>
+        </p:spPr>
+        <p:txBody>
+          <a:bodyPr wrap="square" lIns="0" rIns="0" tIns="0" bIns="0">
+            <a:spAutoFit/>
+          </a:bodyPr>
+          <a:lstStyle/>
+          <a:p>
+            <a:pPr algn="l">
+              <a:lnSpc>
+                <a:spcPct val="115000"/>
+              </a:lnSpc>
+              <a:spcBef>
+                <a:spcPts val="0"/>
+              </a:spcBef>
+              <a:spcAft>
+                <a:spcPts val="2400"/>
+              </a:spcAft>
+            </a:pPr>
+            <a:r>
+              <a:rPr sz="2800" b="0">
+                <a:solidFill>
+                  <a:srgbClr val="1A1A1A"/>
+                </a:solidFill>
+                <a:latin typeface="Helvetica Neue"/>
+              </a:rPr>
+              <a:t>Test suites have outgrown the humans who maintain them.</a:t>
+            </a:r>
+          </a:p>
+          <a:p>
+            <a:pPr algn="l">
+              <a:lnSpc>
+                <a:spcPct val="115000"/>
+              </a:lnSpc>
+              <a:spcBef>
+                <a:spcPts val="0"/>
+              </a:spcBef>
+              <a:spcAft>
+                <a:spcPts val="1600"/>
+              </a:spcAft>
+            </a:pPr>
+            <a:r>
+              <a:rPr sz="2200" b="0">
+                <a:solidFill>
+                  <a:srgbClr val="5F5C57"/>
+                </a:solidFill>
+                <a:latin typeface="Helvetica Neue"/>
+              </a:rPr>
+              <a:t>A modern repo ships thousands of tests across years of contributors.</a:t>
+            </a:r>
+          </a:p>
+          <a:p>
+            <a:pPr algn="l">
+              <a:lnSpc>
+                <a:spcPct val="115000"/>
+              </a:lnSpc>
+              <a:spcBef>
+                <a:spcPts val="0"/>
+              </a:spcBef>
+              <a:spcAft>
+                <a:spcPts val="1600"/>
+              </a:spcAft>
+            </a:pPr>
+            <a:r>
+              <a:rPr sz="2200" b="0">
+                <a:solidFill>
+                  <a:srgbClr val="5F5C57"/>
+                </a:solidFill>
+                <a:latin typeface="Helvetica Neue"/>
+              </a:rPr>
+              <a:t>Coverage percentages say how much code is covered — never by which test.</a:t>
+            </a:r>
+          </a:p>
+          <a:p>
+            <a:pPr algn="l">
+              <a:lnSpc>
+                <a:spcPct val="115000"/>
+              </a:lnSpc>
+              <a:spcBef>
+                <a:spcPts val="0"/>
+              </a:spcBef>
+              <a:spcAft>
+                <a:spcPts val="1600"/>
+              </a:spcAft>
+            </a:pPr>
+            <a:r>
+              <a:rPr sz="2200" b="0">
+                <a:solidFill>
+                  <a:srgbClr val="5F5C57"/>
+                </a:solidFill>
+                <a:latin typeface="Helvetica Neue"/>
+              </a:rPr>
+              <a:t>Tracking that map by hand stopped being possible; it has to be measured.</a:t>
+            </a:r>
+          </a:p>
+        </p:txBody>
+      </p:sp>
+    </p:spTree>
+  </p:cSld>
+  <p:clrMapOvr>
+    <a:masterClrMapping/>
+  </p:clrMapOvr>
+</p:sld>
+</file>
+
+<file path=ppt/slides/slide6.xml><?xml version="1.0" encoding="utf-8"?>
+<p:sld xmlns:a="http://schemas.openxmlformats.org/drawingml/2006/main" xmlns:p="http://schemas.openxmlformats.org/presentationml/2006/main" xmlns:r="http://schemas.openxmlformats.org/officeDocument/2006/relationships">
+  <p:cSld>
+    <p:spTree>
+      <p:nvGrpSpPr>
+        <p:cNvPr id="1" name=""/>
+        <p:cNvGrpSpPr/>
+        <p:nvPr/>
+      </p:nvGrpSpPr>
+      <p:grpSpPr/>
+      <p:sp>
+        <p:nvSpPr>
+          <p:cNvPr id="2" name="Rectangle 1"/>
+          <p:cNvSpPr/>
+          <p:nvPr/>
+        </p:nvSpPr>
+        <p:spPr>
+          <a:xfrm>
+            <a:off x="0" y="0"/>
+            <a:ext cx="12191695" cy="6858000"/>
+          </a:xfrm>
+          <a:prstGeom prst="rect">
+            <a:avLst/>
+          </a:prstGeom>
+          <a:solidFill>
+            <a:srgbClr val="F7F6F3"/>
+          </a:solidFill>
+          <a:ln>
+            <a:noFill/>
+          </a:ln>
+          <a:effectLst/>
+        </p:spPr>
+        <p:style>
+          <a:lnRef idx="1">
+            <a:schemeClr val="accent1"/>
+          </a:lnRef>
+          <a:fillRef idx="3">
+            <a:schemeClr val="accent1"/>
+          </a:fillRef>
+          <a:effectRef idx="2">
+            <a:schemeClr val="accent1"/>
+          </a:effectRef>
+          <a:fontRef idx="minor">
+            <a:schemeClr val="lt1"/>
+          </a:fontRef>
+        </p:style>
+        <p:txBody>
+          <a:bodyPr rtlCol="0" anchor="ctr"/>
+          <a:lstStyle/>
+          <a:p>
+            <a:pPr algn="ctr"/>
+          </a:p>
+        </p:txBody>
+      </p:sp>
+      <p:sp>
+        <p:nvSpPr>
+          <p:cNvPr id="3" name="TextBox 2"/>
+          <p:cNvSpPr txBox="1"/>
+          <p:nvPr/>
+        </p:nvSpPr>
+        <p:spPr>
+          <a:xfrm>
+            <a:off x="1005840" y="777240"/>
+            <a:ext cx="10180015" cy="1005840"/>
           </a:xfrm>
           <a:prstGeom prst="rect">
             <a:avLst/>
@@ -4476,35 +4348,462 @@
               </a:spcAft>
             </a:pPr>
             <a:r>
-              <a:rPr sz="2000" b="1">
+              <a:rPr sz="4400" b="1">
                 <a:solidFill>
                   <a:srgbClr val="1A1A1A"/>
                 </a:solidFill>
-                <a:latin typeface="Arial"/>
+                <a:latin typeface="Helvetica Neue"/>
               </a:rPr>
-              <a:t>It maps</a:t>
-            </a:r>
-          </a:p>
+              <a:t>How it works</a:t>
+            </a:r>
+          </a:p>
+        </p:txBody>
+      </p:sp>
+      <p:sp>
+        <p:nvSpPr>
+          <p:cNvPr id="4" name="Rectangle 3"/>
+          <p:cNvSpPr/>
+          <p:nvPr/>
+        </p:nvSpPr>
+        <p:spPr>
+          <a:xfrm>
+            <a:off x="5364327" y="1874519"/>
+            <a:ext cx="1463040" cy="63500"/>
+          </a:xfrm>
+          <a:prstGeom prst="rect">
+            <a:avLst/>
+          </a:prstGeom>
+          <a:solidFill>
+            <a:srgbClr val="0F7A6C"/>
+          </a:solidFill>
+          <a:ln>
+            <a:noFill/>
+          </a:ln>
+          <a:effectLst/>
+        </p:spPr>
+        <p:style>
+          <a:lnRef idx="1">
+            <a:schemeClr val="accent1"/>
+          </a:lnRef>
+          <a:fillRef idx="3">
+            <a:schemeClr val="accent1"/>
+          </a:fillRef>
+          <a:effectRef idx="2">
+            <a:schemeClr val="accent1"/>
+          </a:effectRef>
+          <a:fontRef idx="minor">
+            <a:schemeClr val="lt1"/>
+          </a:fontRef>
+        </p:style>
+        <p:txBody>
+          <a:bodyPr rtlCol="0" anchor="ctr"/>
+          <a:lstStyle/>
+          <a:p>
+            <a:pPr algn="ctr"/>
+          </a:p>
+        </p:txBody>
+      </p:sp>
+      <p:sp>
+        <p:nvSpPr>
+          <p:cNvPr id="5" name="TextBox 4"/>
+          <p:cNvSpPr txBox="1"/>
+          <p:nvPr/>
+        </p:nvSpPr>
+        <p:spPr>
+          <a:xfrm>
+            <a:off x="792327" y="2606040"/>
+            <a:ext cx="3200400" cy="640080"/>
+          </a:xfrm>
+          <a:prstGeom prst="rect">
+            <a:avLst/>
+          </a:prstGeom>
+          <a:noFill/>
+        </p:spPr>
+        <p:txBody>
+          <a:bodyPr wrap="square" lIns="0" rIns="0" tIns="0" bIns="0">
+            <a:spAutoFit/>
+          </a:bodyPr>
+          <a:lstStyle/>
           <a:p>
             <a:pPr algn="ctr">
               <a:lnSpc>
-                <a:spcPct val="130000"/>
+                <a:spcPct val="115000"/>
               </a:lnSpc>
               <a:spcBef>
-                <a:spcPts val="1200"/>
+                <a:spcPts val="0"/>
               </a:spcBef>
               <a:spcAft>
                 <a:spcPts val="0"/>
               </a:spcAft>
             </a:pPr>
             <a:r>
-              <a:rPr sz="1900" b="0">
+              <a:rPr sz="4000" b="1">
                 <a:solidFill>
-                  <a:srgbClr val="6B6B66"/>
+                  <a:srgbClr val="0F7A6C"/>
                 </a:solidFill>
-                <a:latin typeface="Arial"/>
+                <a:latin typeface="Helvetica Neue"/>
               </a:rPr>
-              <a:t>An interactive map, plus dead tests and untested lines.</a:t>
+              <a:t>1</a:t>
+            </a:r>
+          </a:p>
+        </p:txBody>
+      </p:sp>
+      <p:sp>
+        <p:nvSpPr>
+          <p:cNvPr id="6" name="TextBox 5"/>
+          <p:cNvSpPr txBox="1"/>
+          <p:nvPr/>
+        </p:nvSpPr>
+        <p:spPr>
+          <a:xfrm>
+            <a:off x="792327" y="3383280"/>
+            <a:ext cx="3200400" cy="457200"/>
+          </a:xfrm>
+          <a:prstGeom prst="rect">
+            <a:avLst/>
+          </a:prstGeom>
+          <a:noFill/>
+        </p:spPr>
+        <p:txBody>
+          <a:bodyPr wrap="square" lIns="0" rIns="0" tIns="0" bIns="0">
+            <a:spAutoFit/>
+          </a:bodyPr>
+          <a:lstStyle/>
+          <a:p>
+            <a:pPr algn="ctr">
+              <a:lnSpc>
+                <a:spcPct val="115000"/>
+              </a:lnSpc>
+              <a:spcBef>
+                <a:spcPts val="0"/>
+              </a:spcBef>
+              <a:spcAft>
+                <a:spcPts val="0"/>
+              </a:spcAft>
+            </a:pPr>
+            <a:r>
+              <a:rPr sz="2400" b="1">
+                <a:solidFill>
+                  <a:srgbClr val="1A1A1A"/>
+                </a:solidFill>
+                <a:latin typeface="Helvetica Neue"/>
+              </a:rPr>
+              <a:t>Run it</a:t>
+            </a:r>
+          </a:p>
+        </p:txBody>
+      </p:sp>
+      <p:sp>
+        <p:nvSpPr>
+          <p:cNvPr id="7" name="TextBox 6"/>
+          <p:cNvSpPr txBox="1"/>
+          <p:nvPr/>
+        </p:nvSpPr>
+        <p:spPr>
+          <a:xfrm>
+            <a:off x="792327" y="3977639"/>
+            <a:ext cx="3200400" cy="1371600"/>
+          </a:xfrm>
+          <a:prstGeom prst="rect">
+            <a:avLst/>
+          </a:prstGeom>
+          <a:noFill/>
+        </p:spPr>
+        <p:txBody>
+          <a:bodyPr wrap="square" lIns="0" rIns="0" tIns="0" bIns="0">
+            <a:spAutoFit/>
+          </a:bodyPr>
+          <a:lstStyle/>
+          <a:p>
+            <a:pPr algn="ctr">
+              <a:lnSpc>
+                <a:spcPct val="115000"/>
+              </a:lnSpc>
+              <a:spcBef>
+                <a:spcPts val="0"/>
+              </a:spcBef>
+              <a:spcAft>
+                <a:spcPts val="0"/>
+              </a:spcAft>
+            </a:pPr>
+            <a:r>
+              <a:rPr sz="1600" b="0">
+                <a:solidFill>
+                  <a:srgbClr val="5F5C57"/>
+                </a:solidFill>
+                <a:latin typeface="Menlo"/>
+              </a:rPr>
+              <a:t>marrow watch -- &lt;your test cmd&gt;</a:t>
+            </a:r>
+          </a:p>
+        </p:txBody>
+      </p:sp>
+      <p:sp>
+        <p:nvSpPr>
+          <p:cNvPr id="8" name="TextBox 7"/>
+          <p:cNvSpPr txBox="1"/>
+          <p:nvPr/>
+        </p:nvSpPr>
+        <p:spPr>
+          <a:xfrm>
+            <a:off x="4495647" y="2606040"/>
+            <a:ext cx="3200400" cy="640080"/>
+          </a:xfrm>
+          <a:prstGeom prst="rect">
+            <a:avLst/>
+          </a:prstGeom>
+          <a:noFill/>
+        </p:spPr>
+        <p:txBody>
+          <a:bodyPr wrap="square" lIns="0" rIns="0" tIns="0" bIns="0">
+            <a:spAutoFit/>
+          </a:bodyPr>
+          <a:lstStyle/>
+          <a:p>
+            <a:pPr algn="ctr">
+              <a:lnSpc>
+                <a:spcPct val="115000"/>
+              </a:lnSpc>
+              <a:spcBef>
+                <a:spcPts val="0"/>
+              </a:spcBef>
+              <a:spcAft>
+                <a:spcPts val="0"/>
+              </a:spcAft>
+            </a:pPr>
+            <a:r>
+              <a:rPr sz="4000" b="1">
+                <a:solidFill>
+                  <a:srgbClr val="0F7A6C"/>
+                </a:solidFill>
+                <a:latin typeface="Helvetica Neue"/>
+              </a:rPr>
+              <a:t>2</a:t>
+            </a:r>
+          </a:p>
+        </p:txBody>
+      </p:sp>
+      <p:sp>
+        <p:nvSpPr>
+          <p:cNvPr id="9" name="TextBox 8"/>
+          <p:cNvSpPr txBox="1"/>
+          <p:nvPr/>
+        </p:nvSpPr>
+        <p:spPr>
+          <a:xfrm>
+            <a:off x="4495647" y="3383280"/>
+            <a:ext cx="3200400" cy="457200"/>
+          </a:xfrm>
+          <a:prstGeom prst="rect">
+            <a:avLst/>
+          </a:prstGeom>
+          <a:noFill/>
+        </p:spPr>
+        <p:txBody>
+          <a:bodyPr wrap="square" lIns="0" rIns="0" tIns="0" bIns="0">
+            <a:spAutoFit/>
+          </a:bodyPr>
+          <a:lstStyle/>
+          <a:p>
+            <a:pPr algn="ctr">
+              <a:lnSpc>
+                <a:spcPct val="115000"/>
+              </a:lnSpc>
+              <a:spcBef>
+                <a:spcPts val="0"/>
+              </a:spcBef>
+              <a:spcAft>
+                <a:spcPts val="0"/>
+              </a:spcAft>
+            </a:pPr>
+            <a:r>
+              <a:rPr sz="2400" b="1">
+                <a:solidFill>
+                  <a:srgbClr val="1A1A1A"/>
+                </a:solidFill>
+                <a:latin typeface="Helvetica Neue"/>
+              </a:rPr>
+              <a:t>Marrow records</a:t>
+            </a:r>
+          </a:p>
+        </p:txBody>
+      </p:sp>
+      <p:sp>
+        <p:nvSpPr>
+          <p:cNvPr id="10" name="TextBox 9"/>
+          <p:cNvSpPr txBox="1"/>
+          <p:nvPr/>
+        </p:nvSpPr>
+        <p:spPr>
+          <a:xfrm>
+            <a:off x="4495647" y="3977639"/>
+            <a:ext cx="3200400" cy="1371600"/>
+          </a:xfrm>
+          <a:prstGeom prst="rect">
+            <a:avLst/>
+          </a:prstGeom>
+          <a:noFill/>
+        </p:spPr>
+        <p:txBody>
+          <a:bodyPr wrap="square" lIns="0" rIns="0" tIns="0" bIns="0">
+            <a:spAutoFit/>
+          </a:bodyPr>
+          <a:lstStyle/>
+          <a:p>
+            <a:pPr algn="ctr">
+              <a:lnSpc>
+                <a:spcPct val="115000"/>
+              </a:lnSpc>
+              <a:spcBef>
+                <a:spcPts val="0"/>
+              </a:spcBef>
+              <a:spcAft>
+                <a:spcPts val="0"/>
+              </a:spcAft>
+            </a:pPr>
+            <a:r>
+              <a:rPr sz="1800" b="0">
+                <a:solidFill>
+                  <a:srgbClr val="5F5C57"/>
+                </a:solidFill>
+                <a:latin typeface="Helvetica Neue"/>
+              </a:rPr>
+              <a:t>which lines each test exercised</a:t>
+            </a:r>
+          </a:p>
+        </p:txBody>
+      </p:sp>
+      <p:sp>
+        <p:nvSpPr>
+          <p:cNvPr id="11" name="TextBox 10"/>
+          <p:cNvSpPr txBox="1"/>
+          <p:nvPr/>
+        </p:nvSpPr>
+        <p:spPr>
+          <a:xfrm>
+            <a:off x="8198967" y="2606040"/>
+            <a:ext cx="3200400" cy="640080"/>
+          </a:xfrm>
+          <a:prstGeom prst="rect">
+            <a:avLst/>
+          </a:prstGeom>
+          <a:noFill/>
+        </p:spPr>
+        <p:txBody>
+          <a:bodyPr wrap="square" lIns="0" rIns="0" tIns="0" bIns="0">
+            <a:spAutoFit/>
+          </a:bodyPr>
+          <a:lstStyle/>
+          <a:p>
+            <a:pPr algn="ctr">
+              <a:lnSpc>
+                <a:spcPct val="115000"/>
+              </a:lnSpc>
+              <a:spcBef>
+                <a:spcPts val="0"/>
+              </a:spcBef>
+              <a:spcAft>
+                <a:spcPts val="0"/>
+              </a:spcAft>
+            </a:pPr>
+            <a:r>
+              <a:rPr sz="4000" b="1">
+                <a:solidFill>
+                  <a:srgbClr val="0F7A6C"/>
+                </a:solidFill>
+                <a:latin typeface="Helvetica Neue"/>
+              </a:rPr>
+              <a:t>3</a:t>
+            </a:r>
+          </a:p>
+        </p:txBody>
+      </p:sp>
+      <p:sp>
+        <p:nvSpPr>
+          <p:cNvPr id="12" name="TextBox 11"/>
+          <p:cNvSpPr txBox="1"/>
+          <p:nvPr/>
+        </p:nvSpPr>
+        <p:spPr>
+          <a:xfrm>
+            <a:off x="8198967" y="3383280"/>
+            <a:ext cx="3200400" cy="457200"/>
+          </a:xfrm>
+          <a:prstGeom prst="rect">
+            <a:avLst/>
+          </a:prstGeom>
+          <a:noFill/>
+        </p:spPr>
+        <p:txBody>
+          <a:bodyPr wrap="square" lIns="0" rIns="0" tIns="0" bIns="0">
+            <a:spAutoFit/>
+          </a:bodyPr>
+          <a:lstStyle/>
+          <a:p>
+            <a:pPr algn="ctr">
+              <a:lnSpc>
+                <a:spcPct val="115000"/>
+              </a:lnSpc>
+              <a:spcBef>
+                <a:spcPts val="0"/>
+              </a:spcBef>
+              <a:spcAft>
+                <a:spcPts val="0"/>
+              </a:spcAft>
+            </a:pPr>
+            <a:r>
+              <a:rPr sz="2400" b="1">
+                <a:solidFill>
+                  <a:srgbClr val="1A1A1A"/>
+                </a:solidFill>
+                <a:latin typeface="Helvetica Neue"/>
+              </a:rPr>
+              <a:t>You get a map</a:t>
+            </a:r>
+          </a:p>
+        </p:txBody>
+      </p:sp>
+      <p:sp>
+        <p:nvSpPr>
+          <p:cNvPr id="13" name="TextBox 12"/>
+          <p:cNvSpPr txBox="1"/>
+          <p:nvPr/>
+        </p:nvSpPr>
+        <p:spPr>
+          <a:xfrm>
+            <a:off x="8198967" y="3977639"/>
+            <a:ext cx="3200400" cy="1371600"/>
+          </a:xfrm>
+          <a:prstGeom prst="rect">
+            <a:avLst/>
+          </a:prstGeom>
+          <a:noFill/>
+        </p:spPr>
+        <p:txBody>
+          <a:bodyPr wrap="square" lIns="0" rIns="0" tIns="0" bIns="0">
+            <a:spAutoFit/>
+          </a:bodyPr>
+          <a:lstStyle/>
+          <a:p>
+            <a:pPr algn="ctr">
+              <a:lnSpc>
+                <a:spcPct val="115000"/>
+              </a:lnSpc>
+              <a:spcBef>
+                <a:spcPts val="0"/>
+              </a:spcBef>
+              <a:spcAft>
+                <a:spcPts val="0"/>
+              </a:spcAft>
+            </a:pPr>
+            <a:r>
+              <a:rPr sz="1800" b="0">
+                <a:solidFill>
+                  <a:srgbClr val="5F5C57"/>
+                </a:solidFill>
+                <a:latin typeface="Helvetica Neue"/>
+              </a:rPr>
+              <a:t>interactive map + dead tests + untested lines</a:t>
             </a:r>
           </a:p>
         </p:txBody>
